--- a/u08a_bTrees/notes/_b - Attributes and and building BSTs.pptx
+++ b/u08a_bTrees/notes/_b - Attributes and and building BSTs.pptx
@@ -864,10 +864,10 @@
           </a:ln>
           <a:extLst>
             <a:ext uri="{FAA26D3D-D897-4be2-8F04-BA451C77F1D7}">
-              <ma14:placeholderFlag xmlns:ma14="http://schemas.microsoft.com/office/mac/drawingml/2011/main" xmlns="" val="1"/>
+              <ma14:placeholderFlag xmlns="" xmlns:ma14="http://schemas.microsoft.com/office/mac/drawingml/2011/main" val="1"/>
             </a:ext>
             <a:ext uri="{909E8E84-426E-40dd-AFC4-6F175D3DCCD1}">
-              <a14:hiddenFill xmlns="" xmlns:a14="http://schemas.microsoft.com/office/drawing/2010/main">
+              <a14:hiddenFill xmlns:a14="http://schemas.microsoft.com/office/drawing/2010/main" xmlns="">
                 <a:solidFill>
                   <a:srgbClr val="FFFFFF"/>
                 </a:solidFill>
@@ -890,17 +890,17 @@
           <a:noFill/>
           <a:extLst>
             <a:ext uri="{FAA26D3D-D897-4be2-8F04-BA451C77F1D7}">
-              <ma14:placeholderFlag xmlns:ma14="http://schemas.microsoft.com/office/mac/drawingml/2011/main" xmlns="" val="1"/>
+              <ma14:placeholderFlag xmlns="" xmlns:ma14="http://schemas.microsoft.com/office/mac/drawingml/2011/main" val="1"/>
             </a:ext>
             <a:ext uri="{909E8E84-426E-40dd-AFC4-6F175D3DCCD1}">
-              <a14:hiddenFill xmlns="" xmlns:a14="http://schemas.microsoft.com/office/drawing/2010/main">
+              <a14:hiddenFill xmlns:a14="http://schemas.microsoft.com/office/drawing/2010/main" xmlns="">
                 <a:solidFill>
                   <a:srgbClr val="FFFFFF"/>
                 </a:solidFill>
               </a14:hiddenFill>
             </a:ext>
             <a:ext uri="{91240B29-F687-4f45-9708-019B960494DF}">
-              <a14:hiddenLine xmlns="" xmlns:a14="http://schemas.microsoft.com/office/drawing/2010/main" w="9525">
+              <a14:hiddenLine xmlns:a14="http://schemas.microsoft.com/office/drawing/2010/main" xmlns="" w="9525">
                 <a:solidFill>
                   <a:srgbClr val="000000"/>
                 </a:solidFill>
@@ -939,14 +939,14 @@
           <a:noFill/>
           <a:extLst>
             <a:ext uri="{909E8E84-426E-40dd-AFC4-6F175D3DCCD1}">
-              <a14:hiddenFill xmlns="" xmlns:a14="http://schemas.microsoft.com/office/drawing/2010/main">
+              <a14:hiddenFill xmlns:a14="http://schemas.microsoft.com/office/drawing/2010/main" xmlns="">
                 <a:solidFill>
                   <a:srgbClr val="FFFFFF"/>
                 </a:solidFill>
               </a14:hiddenFill>
             </a:ext>
             <a:ext uri="{91240B29-F687-4f45-9708-019B960494DF}">
-              <a14:hiddenLine xmlns="" xmlns:a14="http://schemas.microsoft.com/office/drawing/2010/main" w="9525">
+              <a14:hiddenLine xmlns:a14="http://schemas.microsoft.com/office/drawing/2010/main" xmlns="" w="9525">
                 <a:solidFill>
                   <a:srgbClr val="000000"/>
                 </a:solidFill>
@@ -1137,10 +1137,10 @@
           </a:ln>
           <a:extLst>
             <a:ext uri="{FAA26D3D-D897-4be2-8F04-BA451C77F1D7}">
-              <ma14:placeholderFlag xmlns:ma14="http://schemas.microsoft.com/office/mac/drawingml/2011/main" xmlns="" val="1"/>
+              <ma14:placeholderFlag xmlns="" xmlns:ma14="http://schemas.microsoft.com/office/mac/drawingml/2011/main" val="1"/>
             </a:ext>
             <a:ext uri="{909E8E84-426E-40dd-AFC4-6F175D3DCCD1}">
-              <a14:hiddenFill xmlns="" xmlns:a14="http://schemas.microsoft.com/office/drawing/2010/main">
+              <a14:hiddenFill xmlns:a14="http://schemas.microsoft.com/office/drawing/2010/main" xmlns="">
                 <a:solidFill>
                   <a:srgbClr val="FFFFFF"/>
                 </a:solidFill>
@@ -1163,17 +1163,17 @@
           <a:noFill/>
           <a:extLst>
             <a:ext uri="{FAA26D3D-D897-4be2-8F04-BA451C77F1D7}">
-              <ma14:placeholderFlag xmlns:ma14="http://schemas.microsoft.com/office/mac/drawingml/2011/main" xmlns="" val="1"/>
+              <ma14:placeholderFlag xmlns="" xmlns:ma14="http://schemas.microsoft.com/office/mac/drawingml/2011/main" val="1"/>
             </a:ext>
             <a:ext uri="{909E8E84-426E-40dd-AFC4-6F175D3DCCD1}">
-              <a14:hiddenFill xmlns="" xmlns:a14="http://schemas.microsoft.com/office/drawing/2010/main">
+              <a14:hiddenFill xmlns:a14="http://schemas.microsoft.com/office/drawing/2010/main" xmlns="">
                 <a:solidFill>
                   <a:srgbClr val="FFFFFF"/>
                 </a:solidFill>
               </a14:hiddenFill>
             </a:ext>
             <a:ext uri="{91240B29-F687-4f45-9708-019B960494DF}">
-              <a14:hiddenLine xmlns="" xmlns:a14="http://schemas.microsoft.com/office/drawing/2010/main" w="9525">
+              <a14:hiddenLine xmlns:a14="http://schemas.microsoft.com/office/drawing/2010/main" xmlns="" w="9525">
                 <a:solidFill>
                   <a:srgbClr val="000000"/>
                 </a:solidFill>
@@ -1212,14 +1212,14 @@
           <a:noFill/>
           <a:extLst>
             <a:ext uri="{909E8E84-426E-40dd-AFC4-6F175D3DCCD1}">
-              <a14:hiddenFill xmlns="" xmlns:a14="http://schemas.microsoft.com/office/drawing/2010/main">
+              <a14:hiddenFill xmlns:a14="http://schemas.microsoft.com/office/drawing/2010/main" xmlns="">
                 <a:solidFill>
                   <a:srgbClr val="FFFFFF"/>
                 </a:solidFill>
               </a14:hiddenFill>
             </a:ext>
             <a:ext uri="{91240B29-F687-4f45-9708-019B960494DF}">
-              <a14:hiddenLine xmlns="" xmlns:a14="http://schemas.microsoft.com/office/drawing/2010/main" w="9525">
+              <a14:hiddenLine xmlns:a14="http://schemas.microsoft.com/office/drawing/2010/main" xmlns="" w="9525">
                 <a:solidFill>
                   <a:srgbClr val="000000"/>
                 </a:solidFill>
@@ -1410,10 +1410,10 @@
           </a:ln>
           <a:extLst>
             <a:ext uri="{FAA26D3D-D897-4be2-8F04-BA451C77F1D7}">
-              <ma14:placeholderFlag xmlns:ma14="http://schemas.microsoft.com/office/mac/drawingml/2011/main" xmlns="" val="1"/>
+              <ma14:placeholderFlag xmlns="" xmlns:ma14="http://schemas.microsoft.com/office/mac/drawingml/2011/main" val="1"/>
             </a:ext>
             <a:ext uri="{909E8E84-426E-40dd-AFC4-6F175D3DCCD1}">
-              <a14:hiddenFill xmlns="" xmlns:a14="http://schemas.microsoft.com/office/drawing/2010/main">
+              <a14:hiddenFill xmlns:a14="http://schemas.microsoft.com/office/drawing/2010/main" xmlns="">
                 <a:solidFill>
                   <a:srgbClr val="FFFFFF"/>
                 </a:solidFill>
@@ -1436,17 +1436,17 @@
           <a:noFill/>
           <a:extLst>
             <a:ext uri="{FAA26D3D-D897-4be2-8F04-BA451C77F1D7}">
-              <ma14:placeholderFlag xmlns:ma14="http://schemas.microsoft.com/office/mac/drawingml/2011/main" xmlns="" val="1"/>
+              <ma14:placeholderFlag xmlns="" xmlns:ma14="http://schemas.microsoft.com/office/mac/drawingml/2011/main" val="1"/>
             </a:ext>
             <a:ext uri="{909E8E84-426E-40dd-AFC4-6F175D3DCCD1}">
-              <a14:hiddenFill xmlns="" xmlns:a14="http://schemas.microsoft.com/office/drawing/2010/main">
+              <a14:hiddenFill xmlns:a14="http://schemas.microsoft.com/office/drawing/2010/main" xmlns="">
                 <a:solidFill>
                   <a:srgbClr val="FFFFFF"/>
                 </a:solidFill>
               </a14:hiddenFill>
             </a:ext>
             <a:ext uri="{91240B29-F687-4f45-9708-019B960494DF}">
-              <a14:hiddenLine xmlns="" xmlns:a14="http://schemas.microsoft.com/office/drawing/2010/main" w="9525">
+              <a14:hiddenLine xmlns:a14="http://schemas.microsoft.com/office/drawing/2010/main" xmlns="" w="9525">
                 <a:solidFill>
                   <a:srgbClr val="000000"/>
                 </a:solidFill>
@@ -1485,14 +1485,14 @@
           <a:noFill/>
           <a:extLst>
             <a:ext uri="{909E8E84-426E-40dd-AFC4-6F175D3DCCD1}">
-              <a14:hiddenFill xmlns="" xmlns:a14="http://schemas.microsoft.com/office/drawing/2010/main">
+              <a14:hiddenFill xmlns:a14="http://schemas.microsoft.com/office/drawing/2010/main" xmlns="">
                 <a:solidFill>
                   <a:srgbClr val="FFFFFF"/>
                 </a:solidFill>
               </a14:hiddenFill>
             </a:ext>
             <a:ext uri="{91240B29-F687-4f45-9708-019B960494DF}">
-              <a14:hiddenLine xmlns="" xmlns:a14="http://schemas.microsoft.com/office/drawing/2010/main" w="9525">
+              <a14:hiddenLine xmlns:a14="http://schemas.microsoft.com/office/drawing/2010/main" xmlns="" w="9525">
                 <a:solidFill>
                   <a:srgbClr val="000000"/>
                 </a:solidFill>
@@ -1683,10 +1683,10 @@
           </a:ln>
           <a:extLst>
             <a:ext uri="{FAA26D3D-D897-4be2-8F04-BA451C77F1D7}">
-              <ma14:placeholderFlag xmlns:ma14="http://schemas.microsoft.com/office/mac/drawingml/2011/main" xmlns="" val="1"/>
+              <ma14:placeholderFlag xmlns="" xmlns:ma14="http://schemas.microsoft.com/office/mac/drawingml/2011/main" val="1"/>
             </a:ext>
             <a:ext uri="{909E8E84-426E-40dd-AFC4-6F175D3DCCD1}">
-              <a14:hiddenFill xmlns="" xmlns:a14="http://schemas.microsoft.com/office/drawing/2010/main">
+              <a14:hiddenFill xmlns:a14="http://schemas.microsoft.com/office/drawing/2010/main" xmlns="">
                 <a:solidFill>
                   <a:srgbClr val="FFFFFF"/>
                 </a:solidFill>
@@ -1709,17 +1709,17 @@
           <a:noFill/>
           <a:extLst>
             <a:ext uri="{FAA26D3D-D897-4be2-8F04-BA451C77F1D7}">
-              <ma14:placeholderFlag xmlns:ma14="http://schemas.microsoft.com/office/mac/drawingml/2011/main" xmlns="" val="1"/>
+              <ma14:placeholderFlag xmlns="" xmlns:ma14="http://schemas.microsoft.com/office/mac/drawingml/2011/main" val="1"/>
             </a:ext>
             <a:ext uri="{909E8E84-426E-40dd-AFC4-6F175D3DCCD1}">
-              <a14:hiddenFill xmlns="" xmlns:a14="http://schemas.microsoft.com/office/drawing/2010/main">
+              <a14:hiddenFill xmlns:a14="http://schemas.microsoft.com/office/drawing/2010/main" xmlns="">
                 <a:solidFill>
                   <a:srgbClr val="FFFFFF"/>
                 </a:solidFill>
               </a14:hiddenFill>
             </a:ext>
             <a:ext uri="{91240B29-F687-4f45-9708-019B960494DF}">
-              <a14:hiddenLine xmlns="" xmlns:a14="http://schemas.microsoft.com/office/drawing/2010/main" w="9525">
+              <a14:hiddenLine xmlns:a14="http://schemas.microsoft.com/office/drawing/2010/main" xmlns="" w="9525">
                 <a:solidFill>
                   <a:srgbClr val="000000"/>
                 </a:solidFill>
@@ -1758,14 +1758,14 @@
           <a:noFill/>
           <a:extLst>
             <a:ext uri="{909E8E84-426E-40dd-AFC4-6F175D3DCCD1}">
-              <a14:hiddenFill xmlns="" xmlns:a14="http://schemas.microsoft.com/office/drawing/2010/main">
+              <a14:hiddenFill xmlns:a14="http://schemas.microsoft.com/office/drawing/2010/main" xmlns="">
                 <a:solidFill>
                   <a:srgbClr val="FFFFFF"/>
                 </a:solidFill>
               </a14:hiddenFill>
             </a:ext>
             <a:ext uri="{91240B29-F687-4f45-9708-019B960494DF}">
-              <a14:hiddenLine xmlns="" xmlns:a14="http://schemas.microsoft.com/office/drawing/2010/main" w="9525">
+              <a14:hiddenLine xmlns:a14="http://schemas.microsoft.com/office/drawing/2010/main" xmlns="" w="9525">
                 <a:solidFill>
                   <a:srgbClr val="000000"/>
                 </a:solidFill>
@@ -1956,10 +1956,10 @@
           </a:ln>
           <a:extLst>
             <a:ext uri="{FAA26D3D-D897-4be2-8F04-BA451C77F1D7}">
-              <ma14:placeholderFlag xmlns:ma14="http://schemas.microsoft.com/office/mac/drawingml/2011/main" xmlns="" val="1"/>
+              <ma14:placeholderFlag xmlns="" xmlns:ma14="http://schemas.microsoft.com/office/mac/drawingml/2011/main" val="1"/>
             </a:ext>
             <a:ext uri="{909E8E84-426E-40dd-AFC4-6F175D3DCCD1}">
-              <a14:hiddenFill xmlns="" xmlns:a14="http://schemas.microsoft.com/office/drawing/2010/main">
+              <a14:hiddenFill xmlns:a14="http://schemas.microsoft.com/office/drawing/2010/main" xmlns="">
                 <a:solidFill>
                   <a:srgbClr val="FFFFFF"/>
                 </a:solidFill>
@@ -1982,17 +1982,17 @@
           <a:noFill/>
           <a:extLst>
             <a:ext uri="{FAA26D3D-D897-4be2-8F04-BA451C77F1D7}">
-              <ma14:placeholderFlag xmlns:ma14="http://schemas.microsoft.com/office/mac/drawingml/2011/main" xmlns="" val="1"/>
+              <ma14:placeholderFlag xmlns="" xmlns:ma14="http://schemas.microsoft.com/office/mac/drawingml/2011/main" val="1"/>
             </a:ext>
             <a:ext uri="{909E8E84-426E-40dd-AFC4-6F175D3DCCD1}">
-              <a14:hiddenFill xmlns="" xmlns:a14="http://schemas.microsoft.com/office/drawing/2010/main">
+              <a14:hiddenFill xmlns:a14="http://schemas.microsoft.com/office/drawing/2010/main" xmlns="">
                 <a:solidFill>
                   <a:srgbClr val="FFFFFF"/>
                 </a:solidFill>
               </a14:hiddenFill>
             </a:ext>
             <a:ext uri="{91240B29-F687-4f45-9708-019B960494DF}">
-              <a14:hiddenLine xmlns="" xmlns:a14="http://schemas.microsoft.com/office/drawing/2010/main" w="9525">
+              <a14:hiddenLine xmlns:a14="http://schemas.microsoft.com/office/drawing/2010/main" xmlns="" w="9525">
                 <a:solidFill>
                   <a:srgbClr val="000000"/>
                 </a:solidFill>
@@ -2031,14 +2031,14 @@
           <a:noFill/>
           <a:extLst>
             <a:ext uri="{909E8E84-426E-40dd-AFC4-6F175D3DCCD1}">
-              <a14:hiddenFill xmlns="" xmlns:a14="http://schemas.microsoft.com/office/drawing/2010/main">
+              <a14:hiddenFill xmlns:a14="http://schemas.microsoft.com/office/drawing/2010/main" xmlns="">
                 <a:solidFill>
                   <a:srgbClr val="FFFFFF"/>
                 </a:solidFill>
               </a14:hiddenFill>
             </a:ext>
             <a:ext uri="{91240B29-F687-4f45-9708-019B960494DF}">
-              <a14:hiddenLine xmlns="" xmlns:a14="http://schemas.microsoft.com/office/drawing/2010/main" w="9525">
+              <a14:hiddenLine xmlns:a14="http://schemas.microsoft.com/office/drawing/2010/main" xmlns="" w="9525">
                 <a:solidFill>
                   <a:srgbClr val="000000"/>
                 </a:solidFill>
@@ -2229,10 +2229,10 @@
           </a:ln>
           <a:extLst>
             <a:ext uri="{FAA26D3D-D897-4be2-8F04-BA451C77F1D7}">
-              <ma14:placeholderFlag xmlns:ma14="http://schemas.microsoft.com/office/mac/drawingml/2011/main" xmlns="" val="1"/>
+              <ma14:placeholderFlag xmlns="" xmlns:ma14="http://schemas.microsoft.com/office/mac/drawingml/2011/main" val="1"/>
             </a:ext>
             <a:ext uri="{909E8E84-426E-40dd-AFC4-6F175D3DCCD1}">
-              <a14:hiddenFill xmlns="" xmlns:a14="http://schemas.microsoft.com/office/drawing/2010/main">
+              <a14:hiddenFill xmlns:a14="http://schemas.microsoft.com/office/drawing/2010/main" xmlns="">
                 <a:solidFill>
                   <a:srgbClr val="FFFFFF"/>
                 </a:solidFill>
@@ -2255,17 +2255,17 @@
           <a:noFill/>
           <a:extLst>
             <a:ext uri="{FAA26D3D-D897-4be2-8F04-BA451C77F1D7}">
-              <ma14:placeholderFlag xmlns:ma14="http://schemas.microsoft.com/office/mac/drawingml/2011/main" xmlns="" val="1"/>
+              <ma14:placeholderFlag xmlns="" xmlns:ma14="http://schemas.microsoft.com/office/mac/drawingml/2011/main" val="1"/>
             </a:ext>
             <a:ext uri="{909E8E84-426E-40dd-AFC4-6F175D3DCCD1}">
-              <a14:hiddenFill xmlns="" xmlns:a14="http://schemas.microsoft.com/office/drawing/2010/main">
+              <a14:hiddenFill xmlns:a14="http://schemas.microsoft.com/office/drawing/2010/main" xmlns="">
                 <a:solidFill>
                   <a:srgbClr val="FFFFFF"/>
                 </a:solidFill>
               </a14:hiddenFill>
             </a:ext>
             <a:ext uri="{91240B29-F687-4f45-9708-019B960494DF}">
-              <a14:hiddenLine xmlns="" xmlns:a14="http://schemas.microsoft.com/office/drawing/2010/main" w="9525">
+              <a14:hiddenLine xmlns:a14="http://schemas.microsoft.com/office/drawing/2010/main" xmlns="" w="9525">
                 <a:solidFill>
                   <a:srgbClr val="000000"/>
                 </a:solidFill>
@@ -2304,14 +2304,14 @@
           <a:noFill/>
           <a:extLst>
             <a:ext uri="{909E8E84-426E-40dd-AFC4-6F175D3DCCD1}">
-              <a14:hiddenFill xmlns="" xmlns:a14="http://schemas.microsoft.com/office/drawing/2010/main">
+              <a14:hiddenFill xmlns:a14="http://schemas.microsoft.com/office/drawing/2010/main" xmlns="">
                 <a:solidFill>
                   <a:srgbClr val="FFFFFF"/>
                 </a:solidFill>
               </a14:hiddenFill>
             </a:ext>
             <a:ext uri="{91240B29-F687-4f45-9708-019B960494DF}">
-              <a14:hiddenLine xmlns="" xmlns:a14="http://schemas.microsoft.com/office/drawing/2010/main" w="9525">
+              <a14:hiddenLine xmlns:a14="http://schemas.microsoft.com/office/drawing/2010/main" xmlns="" w="9525">
                 <a:solidFill>
                   <a:srgbClr val="000000"/>
                 </a:solidFill>
@@ -2502,10 +2502,10 @@
           </a:ln>
           <a:extLst>
             <a:ext uri="{FAA26D3D-D897-4be2-8F04-BA451C77F1D7}">
-              <ma14:placeholderFlag xmlns:ma14="http://schemas.microsoft.com/office/mac/drawingml/2011/main" xmlns="" val="1"/>
+              <ma14:placeholderFlag xmlns="" xmlns:ma14="http://schemas.microsoft.com/office/mac/drawingml/2011/main" val="1"/>
             </a:ext>
             <a:ext uri="{909E8E84-426E-40dd-AFC4-6F175D3DCCD1}">
-              <a14:hiddenFill xmlns="" xmlns:a14="http://schemas.microsoft.com/office/drawing/2010/main">
+              <a14:hiddenFill xmlns:a14="http://schemas.microsoft.com/office/drawing/2010/main" xmlns="">
                 <a:solidFill>
                   <a:srgbClr val="FFFFFF"/>
                 </a:solidFill>
@@ -2528,17 +2528,17 @@
           <a:noFill/>
           <a:extLst>
             <a:ext uri="{FAA26D3D-D897-4be2-8F04-BA451C77F1D7}">
-              <ma14:placeholderFlag xmlns:ma14="http://schemas.microsoft.com/office/mac/drawingml/2011/main" xmlns="" val="1"/>
+              <ma14:placeholderFlag xmlns="" xmlns:ma14="http://schemas.microsoft.com/office/mac/drawingml/2011/main" val="1"/>
             </a:ext>
             <a:ext uri="{909E8E84-426E-40dd-AFC4-6F175D3DCCD1}">
-              <a14:hiddenFill xmlns="" xmlns:a14="http://schemas.microsoft.com/office/drawing/2010/main">
+              <a14:hiddenFill xmlns:a14="http://schemas.microsoft.com/office/drawing/2010/main" xmlns="">
                 <a:solidFill>
                   <a:srgbClr val="FFFFFF"/>
                 </a:solidFill>
               </a14:hiddenFill>
             </a:ext>
             <a:ext uri="{91240B29-F687-4f45-9708-019B960494DF}">
-              <a14:hiddenLine xmlns="" xmlns:a14="http://schemas.microsoft.com/office/drawing/2010/main" w="9525">
+              <a14:hiddenLine xmlns:a14="http://schemas.microsoft.com/office/drawing/2010/main" xmlns="" w="9525">
                 <a:solidFill>
                   <a:srgbClr val="000000"/>
                 </a:solidFill>
@@ -2577,14 +2577,14 @@
           <a:noFill/>
           <a:extLst>
             <a:ext uri="{909E8E84-426E-40dd-AFC4-6F175D3DCCD1}">
-              <a14:hiddenFill xmlns="" xmlns:a14="http://schemas.microsoft.com/office/drawing/2010/main">
+              <a14:hiddenFill xmlns:a14="http://schemas.microsoft.com/office/drawing/2010/main" xmlns="">
                 <a:solidFill>
                   <a:srgbClr val="FFFFFF"/>
                 </a:solidFill>
               </a14:hiddenFill>
             </a:ext>
             <a:ext uri="{91240B29-F687-4f45-9708-019B960494DF}">
-              <a14:hiddenLine xmlns="" xmlns:a14="http://schemas.microsoft.com/office/drawing/2010/main" w="9525">
+              <a14:hiddenLine xmlns:a14="http://schemas.microsoft.com/office/drawing/2010/main" xmlns="" w="9525">
                 <a:solidFill>
                   <a:srgbClr val="000000"/>
                 </a:solidFill>
@@ -2775,10 +2775,10 @@
           </a:ln>
           <a:extLst>
             <a:ext uri="{FAA26D3D-D897-4be2-8F04-BA451C77F1D7}">
-              <ma14:placeholderFlag xmlns:ma14="http://schemas.microsoft.com/office/mac/drawingml/2011/main" xmlns="" val="1"/>
+              <ma14:placeholderFlag xmlns="" xmlns:ma14="http://schemas.microsoft.com/office/mac/drawingml/2011/main" val="1"/>
             </a:ext>
             <a:ext uri="{909E8E84-426E-40dd-AFC4-6F175D3DCCD1}">
-              <a14:hiddenFill xmlns="" xmlns:a14="http://schemas.microsoft.com/office/drawing/2010/main">
+              <a14:hiddenFill xmlns:a14="http://schemas.microsoft.com/office/drawing/2010/main" xmlns="">
                 <a:solidFill>
                   <a:srgbClr val="FFFFFF"/>
                 </a:solidFill>
@@ -2801,17 +2801,17 @@
           <a:noFill/>
           <a:extLst>
             <a:ext uri="{FAA26D3D-D897-4be2-8F04-BA451C77F1D7}">
-              <ma14:placeholderFlag xmlns:ma14="http://schemas.microsoft.com/office/mac/drawingml/2011/main" xmlns="" val="1"/>
+              <ma14:placeholderFlag xmlns="" xmlns:ma14="http://schemas.microsoft.com/office/mac/drawingml/2011/main" val="1"/>
             </a:ext>
             <a:ext uri="{909E8E84-426E-40dd-AFC4-6F175D3DCCD1}">
-              <a14:hiddenFill xmlns="" xmlns:a14="http://schemas.microsoft.com/office/drawing/2010/main">
+              <a14:hiddenFill xmlns:a14="http://schemas.microsoft.com/office/drawing/2010/main" xmlns="">
                 <a:solidFill>
                   <a:srgbClr val="FFFFFF"/>
                 </a:solidFill>
               </a14:hiddenFill>
             </a:ext>
             <a:ext uri="{91240B29-F687-4f45-9708-019B960494DF}">
-              <a14:hiddenLine xmlns="" xmlns:a14="http://schemas.microsoft.com/office/drawing/2010/main" w="9525">
+              <a14:hiddenLine xmlns:a14="http://schemas.microsoft.com/office/drawing/2010/main" xmlns="" w="9525">
                 <a:solidFill>
                   <a:srgbClr val="000000"/>
                 </a:solidFill>
@@ -2850,14 +2850,14 @@
           <a:noFill/>
           <a:extLst>
             <a:ext uri="{909E8E84-426E-40dd-AFC4-6F175D3DCCD1}">
-              <a14:hiddenFill xmlns="" xmlns:a14="http://schemas.microsoft.com/office/drawing/2010/main">
+              <a14:hiddenFill xmlns:a14="http://schemas.microsoft.com/office/drawing/2010/main" xmlns="">
                 <a:solidFill>
                   <a:srgbClr val="FFFFFF"/>
                 </a:solidFill>
               </a14:hiddenFill>
             </a:ext>
             <a:ext uri="{91240B29-F687-4f45-9708-019B960494DF}">
-              <a14:hiddenLine xmlns="" xmlns:a14="http://schemas.microsoft.com/office/drawing/2010/main" w="9525">
+              <a14:hiddenLine xmlns:a14="http://schemas.microsoft.com/office/drawing/2010/main" xmlns="" w="9525">
                 <a:solidFill>
                   <a:srgbClr val="000000"/>
                 </a:solidFill>
@@ -3048,10 +3048,10 @@
           </a:ln>
           <a:extLst>
             <a:ext uri="{FAA26D3D-D897-4be2-8F04-BA451C77F1D7}">
-              <ma14:placeholderFlag xmlns:ma14="http://schemas.microsoft.com/office/mac/drawingml/2011/main" xmlns="" val="1"/>
+              <ma14:placeholderFlag xmlns="" xmlns:ma14="http://schemas.microsoft.com/office/mac/drawingml/2011/main" val="1"/>
             </a:ext>
             <a:ext uri="{909E8E84-426E-40dd-AFC4-6F175D3DCCD1}">
-              <a14:hiddenFill xmlns="" xmlns:a14="http://schemas.microsoft.com/office/drawing/2010/main">
+              <a14:hiddenFill xmlns:a14="http://schemas.microsoft.com/office/drawing/2010/main" xmlns="">
                 <a:solidFill>
                   <a:srgbClr val="FFFFFF"/>
                 </a:solidFill>
@@ -3074,17 +3074,17 @@
           <a:noFill/>
           <a:extLst>
             <a:ext uri="{FAA26D3D-D897-4be2-8F04-BA451C77F1D7}">
-              <ma14:placeholderFlag xmlns:ma14="http://schemas.microsoft.com/office/mac/drawingml/2011/main" xmlns="" val="1"/>
+              <ma14:placeholderFlag xmlns="" xmlns:ma14="http://schemas.microsoft.com/office/mac/drawingml/2011/main" val="1"/>
             </a:ext>
             <a:ext uri="{909E8E84-426E-40dd-AFC4-6F175D3DCCD1}">
-              <a14:hiddenFill xmlns="" xmlns:a14="http://schemas.microsoft.com/office/drawing/2010/main">
+              <a14:hiddenFill xmlns:a14="http://schemas.microsoft.com/office/drawing/2010/main" xmlns="">
                 <a:solidFill>
                   <a:srgbClr val="FFFFFF"/>
                 </a:solidFill>
               </a14:hiddenFill>
             </a:ext>
             <a:ext uri="{91240B29-F687-4f45-9708-019B960494DF}">
-              <a14:hiddenLine xmlns="" xmlns:a14="http://schemas.microsoft.com/office/drawing/2010/main" w="9525">
+              <a14:hiddenLine xmlns:a14="http://schemas.microsoft.com/office/drawing/2010/main" xmlns="" w="9525">
                 <a:solidFill>
                   <a:srgbClr val="000000"/>
                 </a:solidFill>
@@ -3123,14 +3123,14 @@
           <a:noFill/>
           <a:extLst>
             <a:ext uri="{909E8E84-426E-40dd-AFC4-6F175D3DCCD1}">
-              <a14:hiddenFill xmlns="" xmlns:a14="http://schemas.microsoft.com/office/drawing/2010/main">
+              <a14:hiddenFill xmlns:a14="http://schemas.microsoft.com/office/drawing/2010/main" xmlns="">
                 <a:solidFill>
                   <a:srgbClr val="FFFFFF"/>
                 </a:solidFill>
               </a14:hiddenFill>
             </a:ext>
             <a:ext uri="{91240B29-F687-4f45-9708-019B960494DF}">
-              <a14:hiddenLine xmlns="" xmlns:a14="http://schemas.microsoft.com/office/drawing/2010/main" w="9525">
+              <a14:hiddenLine xmlns:a14="http://schemas.microsoft.com/office/drawing/2010/main" xmlns="" w="9525">
                 <a:solidFill>
                   <a:srgbClr val="000000"/>
                 </a:solidFill>
@@ -4239,10 +4239,10 @@
           </a:ln>
           <a:extLst>
             <a:ext uri="{FAA26D3D-D897-4be2-8F04-BA451C77F1D7}">
-              <ma14:placeholderFlag xmlns:ma14="http://schemas.microsoft.com/office/mac/drawingml/2011/main" xmlns="" val="1"/>
+              <ma14:placeholderFlag xmlns="" xmlns:ma14="http://schemas.microsoft.com/office/mac/drawingml/2011/main" val="1"/>
             </a:ext>
             <a:ext uri="{909E8E84-426E-40dd-AFC4-6F175D3DCCD1}">
-              <a14:hiddenFill xmlns="" xmlns:a14="http://schemas.microsoft.com/office/drawing/2010/main">
+              <a14:hiddenFill xmlns:a14="http://schemas.microsoft.com/office/drawing/2010/main" xmlns="">
                 <a:solidFill>
                   <a:srgbClr val="FFFFFF"/>
                 </a:solidFill>
@@ -4265,17 +4265,17 @@
           <a:noFill/>
           <a:extLst>
             <a:ext uri="{FAA26D3D-D897-4be2-8F04-BA451C77F1D7}">
-              <ma14:placeholderFlag xmlns:ma14="http://schemas.microsoft.com/office/mac/drawingml/2011/main" xmlns="" val="1"/>
+              <ma14:placeholderFlag xmlns="" xmlns:ma14="http://schemas.microsoft.com/office/mac/drawingml/2011/main" val="1"/>
             </a:ext>
             <a:ext uri="{909E8E84-426E-40dd-AFC4-6F175D3DCCD1}">
-              <a14:hiddenFill xmlns="" xmlns:a14="http://schemas.microsoft.com/office/drawing/2010/main">
+              <a14:hiddenFill xmlns:a14="http://schemas.microsoft.com/office/drawing/2010/main" xmlns="">
                 <a:solidFill>
                   <a:srgbClr val="FFFFFF"/>
                 </a:solidFill>
               </a14:hiddenFill>
             </a:ext>
             <a:ext uri="{91240B29-F687-4f45-9708-019B960494DF}">
-              <a14:hiddenLine xmlns="" xmlns:a14="http://schemas.microsoft.com/office/drawing/2010/main" w="9525">
+              <a14:hiddenLine xmlns:a14="http://schemas.microsoft.com/office/drawing/2010/main" xmlns="" w="9525">
                 <a:solidFill>
                   <a:srgbClr val="000000"/>
                 </a:solidFill>
@@ -4314,14 +4314,14 @@
           <a:noFill/>
           <a:extLst>
             <a:ext uri="{909E8E84-426E-40dd-AFC4-6F175D3DCCD1}">
-              <a14:hiddenFill xmlns="" xmlns:a14="http://schemas.microsoft.com/office/drawing/2010/main">
+              <a14:hiddenFill xmlns:a14="http://schemas.microsoft.com/office/drawing/2010/main" xmlns="">
                 <a:solidFill>
                   <a:srgbClr val="FFFFFF"/>
                 </a:solidFill>
               </a14:hiddenFill>
             </a:ext>
             <a:ext uri="{91240B29-F687-4f45-9708-019B960494DF}">
-              <a14:hiddenLine xmlns="" xmlns:a14="http://schemas.microsoft.com/office/drawing/2010/main" w="9525">
+              <a14:hiddenLine xmlns:a14="http://schemas.microsoft.com/office/drawing/2010/main" xmlns="" w="9525">
                 <a:solidFill>
                   <a:srgbClr val="000000"/>
                 </a:solidFill>
@@ -4512,10 +4512,10 @@
           </a:ln>
           <a:extLst>
             <a:ext uri="{FAA26D3D-D897-4be2-8F04-BA451C77F1D7}">
-              <ma14:placeholderFlag xmlns:ma14="http://schemas.microsoft.com/office/mac/drawingml/2011/main" xmlns="" val="1"/>
+              <ma14:placeholderFlag xmlns="" xmlns:ma14="http://schemas.microsoft.com/office/mac/drawingml/2011/main" val="1"/>
             </a:ext>
             <a:ext uri="{909E8E84-426E-40dd-AFC4-6F175D3DCCD1}">
-              <a14:hiddenFill xmlns="" xmlns:a14="http://schemas.microsoft.com/office/drawing/2010/main">
+              <a14:hiddenFill xmlns:a14="http://schemas.microsoft.com/office/drawing/2010/main" xmlns="">
                 <a:solidFill>
                   <a:srgbClr val="FFFFFF"/>
                 </a:solidFill>
@@ -4538,17 +4538,17 @@
           <a:noFill/>
           <a:extLst>
             <a:ext uri="{FAA26D3D-D897-4be2-8F04-BA451C77F1D7}">
-              <ma14:placeholderFlag xmlns:ma14="http://schemas.microsoft.com/office/mac/drawingml/2011/main" xmlns="" val="1"/>
+              <ma14:placeholderFlag xmlns="" xmlns:ma14="http://schemas.microsoft.com/office/mac/drawingml/2011/main" val="1"/>
             </a:ext>
             <a:ext uri="{909E8E84-426E-40dd-AFC4-6F175D3DCCD1}">
-              <a14:hiddenFill xmlns="" xmlns:a14="http://schemas.microsoft.com/office/drawing/2010/main">
+              <a14:hiddenFill xmlns:a14="http://schemas.microsoft.com/office/drawing/2010/main" xmlns="">
                 <a:solidFill>
                   <a:srgbClr val="FFFFFF"/>
                 </a:solidFill>
               </a14:hiddenFill>
             </a:ext>
             <a:ext uri="{91240B29-F687-4f45-9708-019B960494DF}">
-              <a14:hiddenLine xmlns="" xmlns:a14="http://schemas.microsoft.com/office/drawing/2010/main" w="9525">
+              <a14:hiddenLine xmlns:a14="http://schemas.microsoft.com/office/drawing/2010/main" xmlns="" w="9525">
                 <a:solidFill>
                   <a:srgbClr val="000000"/>
                 </a:solidFill>
@@ -4587,14 +4587,14 @@
           <a:noFill/>
           <a:extLst>
             <a:ext uri="{909E8E84-426E-40dd-AFC4-6F175D3DCCD1}">
-              <a14:hiddenFill xmlns="" xmlns:a14="http://schemas.microsoft.com/office/drawing/2010/main">
+              <a14:hiddenFill xmlns:a14="http://schemas.microsoft.com/office/drawing/2010/main" xmlns="">
                 <a:solidFill>
                   <a:srgbClr val="FFFFFF"/>
                 </a:solidFill>
               </a14:hiddenFill>
             </a:ext>
             <a:ext uri="{91240B29-F687-4f45-9708-019B960494DF}">
-              <a14:hiddenLine xmlns="" xmlns:a14="http://schemas.microsoft.com/office/drawing/2010/main" w="9525">
+              <a14:hiddenLine xmlns:a14="http://schemas.microsoft.com/office/drawing/2010/main" xmlns="" w="9525">
                 <a:solidFill>
                   <a:srgbClr val="000000"/>
                 </a:solidFill>
@@ -4785,10 +4785,10 @@
           </a:ln>
           <a:extLst>
             <a:ext uri="{FAA26D3D-D897-4be2-8F04-BA451C77F1D7}">
-              <ma14:placeholderFlag xmlns:ma14="http://schemas.microsoft.com/office/mac/drawingml/2011/main" xmlns="" val="1"/>
+              <ma14:placeholderFlag xmlns="" xmlns:ma14="http://schemas.microsoft.com/office/mac/drawingml/2011/main" val="1"/>
             </a:ext>
             <a:ext uri="{909E8E84-426E-40dd-AFC4-6F175D3DCCD1}">
-              <a14:hiddenFill xmlns="" xmlns:a14="http://schemas.microsoft.com/office/drawing/2010/main">
+              <a14:hiddenFill xmlns:a14="http://schemas.microsoft.com/office/drawing/2010/main" xmlns="">
                 <a:solidFill>
                   <a:srgbClr val="FFFFFF"/>
                 </a:solidFill>
@@ -4811,17 +4811,17 @@
           <a:noFill/>
           <a:extLst>
             <a:ext uri="{FAA26D3D-D897-4be2-8F04-BA451C77F1D7}">
-              <ma14:placeholderFlag xmlns:ma14="http://schemas.microsoft.com/office/mac/drawingml/2011/main" xmlns="" val="1"/>
+              <ma14:placeholderFlag xmlns="" xmlns:ma14="http://schemas.microsoft.com/office/mac/drawingml/2011/main" val="1"/>
             </a:ext>
             <a:ext uri="{909E8E84-426E-40dd-AFC4-6F175D3DCCD1}">
-              <a14:hiddenFill xmlns="" xmlns:a14="http://schemas.microsoft.com/office/drawing/2010/main">
+              <a14:hiddenFill xmlns:a14="http://schemas.microsoft.com/office/drawing/2010/main" xmlns="">
                 <a:solidFill>
                   <a:srgbClr val="FFFFFF"/>
                 </a:solidFill>
               </a14:hiddenFill>
             </a:ext>
             <a:ext uri="{91240B29-F687-4f45-9708-019B960494DF}">
-              <a14:hiddenLine xmlns="" xmlns:a14="http://schemas.microsoft.com/office/drawing/2010/main" w="9525">
+              <a14:hiddenLine xmlns:a14="http://schemas.microsoft.com/office/drawing/2010/main" xmlns="" w="9525">
                 <a:solidFill>
                   <a:srgbClr val="000000"/>
                 </a:solidFill>
@@ -4860,14 +4860,14 @@
           <a:noFill/>
           <a:extLst>
             <a:ext uri="{909E8E84-426E-40dd-AFC4-6F175D3DCCD1}">
-              <a14:hiddenFill xmlns="" xmlns:a14="http://schemas.microsoft.com/office/drawing/2010/main">
+              <a14:hiddenFill xmlns:a14="http://schemas.microsoft.com/office/drawing/2010/main" xmlns="">
                 <a:solidFill>
                   <a:srgbClr val="FFFFFF"/>
                 </a:solidFill>
               </a14:hiddenFill>
             </a:ext>
             <a:ext uri="{91240B29-F687-4f45-9708-019B960494DF}">
-              <a14:hiddenLine xmlns="" xmlns:a14="http://schemas.microsoft.com/office/drawing/2010/main" w="9525">
+              <a14:hiddenLine xmlns:a14="http://schemas.microsoft.com/office/drawing/2010/main" xmlns="" w="9525">
                 <a:solidFill>
                   <a:srgbClr val="000000"/>
                 </a:solidFill>
@@ -5058,10 +5058,10 @@
           </a:ln>
           <a:extLst>
             <a:ext uri="{FAA26D3D-D897-4be2-8F04-BA451C77F1D7}">
-              <ma14:placeholderFlag xmlns:ma14="http://schemas.microsoft.com/office/mac/drawingml/2011/main" xmlns="" val="1"/>
+              <ma14:placeholderFlag xmlns="" xmlns:ma14="http://schemas.microsoft.com/office/mac/drawingml/2011/main" val="1"/>
             </a:ext>
             <a:ext uri="{909E8E84-426E-40dd-AFC4-6F175D3DCCD1}">
-              <a14:hiddenFill xmlns="" xmlns:a14="http://schemas.microsoft.com/office/drawing/2010/main">
+              <a14:hiddenFill xmlns:a14="http://schemas.microsoft.com/office/drawing/2010/main" xmlns="">
                 <a:solidFill>
                   <a:srgbClr val="FFFFFF"/>
                 </a:solidFill>
@@ -5084,17 +5084,17 @@
           <a:noFill/>
           <a:extLst>
             <a:ext uri="{FAA26D3D-D897-4be2-8F04-BA451C77F1D7}">
-              <ma14:placeholderFlag xmlns:ma14="http://schemas.microsoft.com/office/mac/drawingml/2011/main" xmlns="" val="1"/>
+              <ma14:placeholderFlag xmlns="" xmlns:ma14="http://schemas.microsoft.com/office/mac/drawingml/2011/main" val="1"/>
             </a:ext>
             <a:ext uri="{909E8E84-426E-40dd-AFC4-6F175D3DCCD1}">
-              <a14:hiddenFill xmlns="" xmlns:a14="http://schemas.microsoft.com/office/drawing/2010/main">
+              <a14:hiddenFill xmlns:a14="http://schemas.microsoft.com/office/drawing/2010/main" xmlns="">
                 <a:solidFill>
                   <a:srgbClr val="FFFFFF"/>
                 </a:solidFill>
               </a14:hiddenFill>
             </a:ext>
             <a:ext uri="{91240B29-F687-4f45-9708-019B960494DF}">
-              <a14:hiddenLine xmlns="" xmlns:a14="http://schemas.microsoft.com/office/drawing/2010/main" w="9525">
+              <a14:hiddenLine xmlns:a14="http://schemas.microsoft.com/office/drawing/2010/main" xmlns="" w="9525">
                 <a:solidFill>
                   <a:srgbClr val="000000"/>
                 </a:solidFill>
@@ -5133,14 +5133,14 @@
           <a:noFill/>
           <a:extLst>
             <a:ext uri="{909E8E84-426E-40dd-AFC4-6F175D3DCCD1}">
-              <a14:hiddenFill xmlns="" xmlns:a14="http://schemas.microsoft.com/office/drawing/2010/main">
+              <a14:hiddenFill xmlns:a14="http://schemas.microsoft.com/office/drawing/2010/main" xmlns="">
                 <a:solidFill>
                   <a:srgbClr val="FFFFFF"/>
                 </a:solidFill>
               </a14:hiddenFill>
             </a:ext>
             <a:ext uri="{91240B29-F687-4f45-9708-019B960494DF}">
-              <a14:hiddenLine xmlns="" xmlns:a14="http://schemas.microsoft.com/office/drawing/2010/main" w="9525">
+              <a14:hiddenLine xmlns:a14="http://schemas.microsoft.com/office/drawing/2010/main" xmlns="" w="9525">
                 <a:solidFill>
                   <a:srgbClr val="000000"/>
                 </a:solidFill>
@@ -9315,14 +9315,14 @@
           <a:noFill/>
           <a:extLst>
             <a:ext uri="{909E8E84-426E-40dd-AFC4-6F175D3DCCD1}">
-              <a14:hiddenFill xmlns="" xmlns:a14="http://schemas.microsoft.com/office/drawing/2010/main">
+              <a14:hiddenFill xmlns:a14="http://schemas.microsoft.com/office/drawing/2010/main" xmlns="">
                 <a:solidFill>
                   <a:srgbClr val="FFFFFF"/>
                 </a:solidFill>
               </a14:hiddenFill>
             </a:ext>
             <a:ext uri="{91240B29-F687-4f45-9708-019B960494DF}">
-              <a14:hiddenLine xmlns="" xmlns:a14="http://schemas.microsoft.com/office/drawing/2010/main" w="9525">
+              <a14:hiddenLine xmlns:a14="http://schemas.microsoft.com/office/drawing/2010/main" xmlns="" w="9525">
                 <a:solidFill>
                   <a:srgbClr val="000000"/>
                 </a:solidFill>
@@ -9718,14 +9718,14 @@
           <a:noFill/>
           <a:extLst>
             <a:ext uri="{909E8E84-426E-40dd-AFC4-6F175D3DCCD1}">
-              <a14:hiddenFill xmlns="" xmlns:a14="http://schemas.microsoft.com/office/drawing/2010/main">
+              <a14:hiddenFill xmlns:a14="http://schemas.microsoft.com/office/drawing/2010/main" xmlns="">
                 <a:solidFill>
                   <a:srgbClr val="FFFFFF"/>
                 </a:solidFill>
               </a14:hiddenFill>
             </a:ext>
             <a:ext uri="{91240B29-F687-4f45-9708-019B960494DF}">
-              <a14:hiddenLine xmlns="" xmlns:a14="http://schemas.microsoft.com/office/drawing/2010/main" w="9525">
+              <a14:hiddenLine xmlns:a14="http://schemas.microsoft.com/office/drawing/2010/main" xmlns="" w="9525">
                 <a:solidFill>
                   <a:srgbClr val="000000"/>
                 </a:solidFill>
@@ -10154,14 +10154,14 @@
           <a:noFill/>
           <a:extLst>
             <a:ext uri="{909E8E84-426E-40dd-AFC4-6F175D3DCCD1}">
-              <a14:hiddenFill xmlns="" xmlns:a14="http://schemas.microsoft.com/office/drawing/2010/main">
+              <a14:hiddenFill xmlns:a14="http://schemas.microsoft.com/office/drawing/2010/main" xmlns="">
                 <a:solidFill>
                   <a:srgbClr val="FFFFFF"/>
                 </a:solidFill>
               </a14:hiddenFill>
             </a:ext>
             <a:ext uri="{91240B29-F687-4f45-9708-019B960494DF}">
-              <a14:hiddenLine xmlns="" xmlns:a14="http://schemas.microsoft.com/office/drawing/2010/main" w="9525">
+              <a14:hiddenLine xmlns:a14="http://schemas.microsoft.com/office/drawing/2010/main" xmlns="" w="9525">
                 <a:solidFill>
                   <a:srgbClr val="000000"/>
                 </a:solidFill>
@@ -10590,14 +10590,14 @@
           <a:noFill/>
           <a:extLst>
             <a:ext uri="{909E8E84-426E-40dd-AFC4-6F175D3DCCD1}">
-              <a14:hiddenFill xmlns="" xmlns:a14="http://schemas.microsoft.com/office/drawing/2010/main">
+              <a14:hiddenFill xmlns:a14="http://schemas.microsoft.com/office/drawing/2010/main" xmlns="">
                 <a:solidFill>
                   <a:srgbClr val="FFFFFF"/>
                 </a:solidFill>
               </a14:hiddenFill>
             </a:ext>
             <a:ext uri="{91240B29-F687-4f45-9708-019B960494DF}">
-              <a14:hiddenLine xmlns="" xmlns:a14="http://schemas.microsoft.com/office/drawing/2010/main" w="9525">
+              <a14:hiddenLine xmlns:a14="http://schemas.microsoft.com/office/drawing/2010/main" xmlns="" w="9525">
                 <a:solidFill>
                   <a:srgbClr val="000000"/>
                 </a:solidFill>
@@ -11103,14 +11103,14 @@
           <a:noFill/>
           <a:extLst>
             <a:ext uri="{909E8E84-426E-40dd-AFC4-6F175D3DCCD1}">
-              <a14:hiddenFill xmlns="" xmlns:a14="http://schemas.microsoft.com/office/drawing/2010/main">
+              <a14:hiddenFill xmlns:a14="http://schemas.microsoft.com/office/drawing/2010/main" xmlns="">
                 <a:solidFill>
                   <a:srgbClr val="FFFFFF"/>
                 </a:solidFill>
               </a14:hiddenFill>
             </a:ext>
             <a:ext uri="{91240B29-F687-4f45-9708-019B960494DF}">
-              <a14:hiddenLine xmlns="" xmlns:a14="http://schemas.microsoft.com/office/drawing/2010/main" w="9525">
+              <a14:hiddenLine xmlns:a14="http://schemas.microsoft.com/office/drawing/2010/main" xmlns="" w="9525">
                 <a:solidFill>
                   <a:srgbClr val="000000"/>
                 </a:solidFill>
@@ -11644,14 +11644,14 @@
           <a:noFill/>
           <a:extLst>
             <a:ext uri="{909E8E84-426E-40dd-AFC4-6F175D3DCCD1}">
-              <a14:hiddenFill xmlns="" xmlns:a14="http://schemas.microsoft.com/office/drawing/2010/main">
+              <a14:hiddenFill xmlns:a14="http://schemas.microsoft.com/office/drawing/2010/main" xmlns="">
                 <a:solidFill>
                   <a:srgbClr val="FFFFFF"/>
                 </a:solidFill>
               </a14:hiddenFill>
             </a:ext>
             <a:ext uri="{91240B29-F687-4f45-9708-019B960494DF}">
-              <a14:hiddenLine xmlns="" xmlns:a14="http://schemas.microsoft.com/office/drawing/2010/main" w="9525">
+              <a14:hiddenLine xmlns:a14="http://schemas.microsoft.com/office/drawing/2010/main" xmlns="" w="9525">
                 <a:solidFill>
                   <a:srgbClr val="000000"/>
                 </a:solidFill>
@@ -12185,14 +12185,14 @@
           <a:noFill/>
           <a:extLst>
             <a:ext uri="{909E8E84-426E-40dd-AFC4-6F175D3DCCD1}">
-              <a14:hiddenFill xmlns="" xmlns:a14="http://schemas.microsoft.com/office/drawing/2010/main">
+              <a14:hiddenFill xmlns:a14="http://schemas.microsoft.com/office/drawing/2010/main" xmlns="">
                 <a:solidFill>
                   <a:srgbClr val="FFFFFF"/>
                 </a:solidFill>
               </a14:hiddenFill>
             </a:ext>
             <a:ext uri="{91240B29-F687-4f45-9708-019B960494DF}">
-              <a14:hiddenLine xmlns="" xmlns:a14="http://schemas.microsoft.com/office/drawing/2010/main" w="9525">
+              <a14:hiddenLine xmlns:a14="http://schemas.microsoft.com/office/drawing/2010/main" xmlns="" w="9525">
                 <a:solidFill>
                   <a:srgbClr val="000000"/>
                 </a:solidFill>
@@ -12840,14 +12840,14 @@
           <a:noFill/>
           <a:extLst>
             <a:ext uri="{909E8E84-426E-40dd-AFC4-6F175D3DCCD1}">
-              <a14:hiddenFill xmlns="" xmlns:a14="http://schemas.microsoft.com/office/drawing/2010/main">
+              <a14:hiddenFill xmlns:a14="http://schemas.microsoft.com/office/drawing/2010/main" xmlns="">
                 <a:solidFill>
                   <a:srgbClr val="FFFFFF"/>
                 </a:solidFill>
               </a14:hiddenFill>
             </a:ext>
             <a:ext uri="{91240B29-F687-4f45-9708-019B960494DF}">
-              <a14:hiddenLine xmlns="" xmlns:a14="http://schemas.microsoft.com/office/drawing/2010/main" w="9525">
+              <a14:hiddenLine xmlns:a14="http://schemas.microsoft.com/office/drawing/2010/main" xmlns="" w="9525">
                 <a:solidFill>
                   <a:srgbClr val="000000"/>
                 </a:solidFill>
@@ -13495,14 +13495,14 @@
           <a:noFill/>
           <a:extLst>
             <a:ext uri="{909E8E84-426E-40dd-AFC4-6F175D3DCCD1}">
-              <a14:hiddenFill xmlns="" xmlns:a14="http://schemas.microsoft.com/office/drawing/2010/main">
+              <a14:hiddenFill xmlns:a14="http://schemas.microsoft.com/office/drawing/2010/main" xmlns="">
                 <a:solidFill>
                   <a:srgbClr val="FFFFFF"/>
                 </a:solidFill>
               </a14:hiddenFill>
             </a:ext>
             <a:ext uri="{91240B29-F687-4f45-9708-019B960494DF}">
-              <a14:hiddenLine xmlns="" xmlns:a14="http://schemas.microsoft.com/office/drawing/2010/main" w="9525">
+              <a14:hiddenLine xmlns:a14="http://schemas.microsoft.com/office/drawing/2010/main" xmlns="" w="9525">
                 <a:solidFill>
                   <a:srgbClr val="000000"/>
                 </a:solidFill>
@@ -14150,14 +14150,14 @@
           <a:noFill/>
           <a:extLst>
             <a:ext uri="{909E8E84-426E-40dd-AFC4-6F175D3DCCD1}">
-              <a14:hiddenFill xmlns="" xmlns:a14="http://schemas.microsoft.com/office/drawing/2010/main">
+              <a14:hiddenFill xmlns:a14="http://schemas.microsoft.com/office/drawing/2010/main" xmlns="">
                 <a:solidFill>
                   <a:srgbClr val="FFFFFF"/>
                 </a:solidFill>
               </a14:hiddenFill>
             </a:ext>
             <a:ext uri="{91240B29-F687-4f45-9708-019B960494DF}">
-              <a14:hiddenLine xmlns="" xmlns:a14="http://schemas.microsoft.com/office/drawing/2010/main" w="9525">
+              <a14:hiddenLine xmlns:a14="http://schemas.microsoft.com/office/drawing/2010/main" xmlns="" w="9525">
                 <a:solidFill>
                   <a:srgbClr val="000000"/>
                 </a:solidFill>
@@ -21849,7 +21849,7 @@
                 </a:ln>
                 <a:extLst>
                   <a:ext uri="{909E8E84-426E-40dd-AFC4-6F175D3DCCD1}">
-                    <a14:hiddenFill xmlns="" xmlns:a14="http://schemas.microsoft.com/office/drawing/2010/main">
+                    <a14:hiddenFill xmlns:a14="http://schemas.microsoft.com/office/drawing/2010/main" xmlns="">
                       <a:solidFill>
                         <a:srgbClr val="FFFFFF"/>
                       </a:solidFill>
@@ -22003,14 +22003,14 @@
                 </a:ln>
                 <a:extLst>
                   <a:ext uri="{909E8E84-426E-40dd-AFC4-6F175D3DCCD1}">
-                    <a14:hiddenFill xmlns="" xmlns:a14="http://schemas.microsoft.com/office/drawing/2010/main">
+                    <a14:hiddenFill xmlns:a14="http://schemas.microsoft.com/office/drawing/2010/main" xmlns="">
                       <a:solidFill>
                         <a:srgbClr val="FFFFFF"/>
                       </a:solidFill>
                     </a14:hiddenFill>
                   </a:ext>
                   <a:ext uri="{91240B29-F687-4f45-9708-019B960494DF}">
-                    <a14:hiddenLine xmlns="" xmlns:a14="http://schemas.microsoft.com/office/drawing/2010/main" w="12700">
+                    <a14:hiddenLine xmlns:a14="http://schemas.microsoft.com/office/drawing/2010/main" xmlns="" w="12700">
                       <a:solidFill>
                         <a:srgbClr val="000000"/>
                       </a:solidFill>
@@ -22202,7 +22202,7 @@
                 </a:ln>
                 <a:extLst>
                   <a:ext uri="{909E8E84-426E-40dd-AFC4-6F175D3DCCD1}">
-                    <a14:hiddenFill xmlns="" xmlns:a14="http://schemas.microsoft.com/office/drawing/2010/main">
+                    <a14:hiddenFill xmlns:a14="http://schemas.microsoft.com/office/drawing/2010/main" xmlns="">
                       <a:solidFill>
                         <a:srgbClr val="FFFFFF"/>
                       </a:solidFill>
@@ -22356,14 +22356,14 @@
                 </a:ln>
                 <a:extLst>
                   <a:ext uri="{909E8E84-426E-40dd-AFC4-6F175D3DCCD1}">
-                    <a14:hiddenFill xmlns="" xmlns:a14="http://schemas.microsoft.com/office/drawing/2010/main">
+                    <a14:hiddenFill xmlns:a14="http://schemas.microsoft.com/office/drawing/2010/main" xmlns="">
                       <a:solidFill>
                         <a:srgbClr val="FFFFFF"/>
                       </a:solidFill>
                     </a14:hiddenFill>
                   </a:ext>
                   <a:ext uri="{91240B29-F687-4f45-9708-019B960494DF}">
-                    <a14:hiddenLine xmlns="" xmlns:a14="http://schemas.microsoft.com/office/drawing/2010/main" w="12700">
+                    <a14:hiddenLine xmlns:a14="http://schemas.microsoft.com/office/drawing/2010/main" xmlns="" w="12700">
                       <a:solidFill>
                         <a:srgbClr val="000000"/>
                       </a:solidFill>
@@ -22555,7 +22555,7 @@
                 </a:ln>
                 <a:extLst>
                   <a:ext uri="{909E8E84-426E-40dd-AFC4-6F175D3DCCD1}">
-                    <a14:hiddenFill xmlns="" xmlns:a14="http://schemas.microsoft.com/office/drawing/2010/main">
+                    <a14:hiddenFill xmlns:a14="http://schemas.microsoft.com/office/drawing/2010/main" xmlns="">
                       <a:solidFill>
                         <a:srgbClr val="FFFFFF"/>
                       </a:solidFill>
@@ -22709,14 +22709,14 @@
                 </a:ln>
                 <a:extLst>
                   <a:ext uri="{909E8E84-426E-40dd-AFC4-6F175D3DCCD1}">
-                    <a14:hiddenFill xmlns="" xmlns:a14="http://schemas.microsoft.com/office/drawing/2010/main">
+                    <a14:hiddenFill xmlns:a14="http://schemas.microsoft.com/office/drawing/2010/main" xmlns="">
                       <a:solidFill>
                         <a:srgbClr val="FFFFFF"/>
                       </a:solidFill>
                     </a14:hiddenFill>
                   </a:ext>
                   <a:ext uri="{91240B29-F687-4f45-9708-019B960494DF}">
-                    <a14:hiddenLine xmlns="" xmlns:a14="http://schemas.microsoft.com/office/drawing/2010/main" w="12700">
+                    <a14:hiddenLine xmlns:a14="http://schemas.microsoft.com/office/drawing/2010/main" xmlns="" w="12700">
                       <a:solidFill>
                         <a:srgbClr val="000000"/>
                       </a:solidFill>
@@ -22908,7 +22908,7 @@
                 </a:ln>
                 <a:extLst>
                   <a:ext uri="{909E8E84-426E-40dd-AFC4-6F175D3DCCD1}">
-                    <a14:hiddenFill xmlns="" xmlns:a14="http://schemas.microsoft.com/office/drawing/2010/main">
+                    <a14:hiddenFill xmlns:a14="http://schemas.microsoft.com/office/drawing/2010/main" xmlns="">
                       <a:solidFill>
                         <a:srgbClr val="FFFFFF"/>
                       </a:solidFill>
@@ -23062,14 +23062,14 @@
                 </a:ln>
                 <a:extLst>
                   <a:ext uri="{909E8E84-426E-40dd-AFC4-6F175D3DCCD1}">
-                    <a14:hiddenFill xmlns="" xmlns:a14="http://schemas.microsoft.com/office/drawing/2010/main">
+                    <a14:hiddenFill xmlns:a14="http://schemas.microsoft.com/office/drawing/2010/main" xmlns="">
                       <a:solidFill>
                         <a:srgbClr val="FFFFFF"/>
                       </a:solidFill>
                     </a14:hiddenFill>
                   </a:ext>
                   <a:ext uri="{91240B29-F687-4f45-9708-019B960494DF}">
-                    <a14:hiddenLine xmlns="" xmlns:a14="http://schemas.microsoft.com/office/drawing/2010/main" w="12700">
+                    <a14:hiddenLine xmlns:a14="http://schemas.microsoft.com/office/drawing/2010/main" xmlns="" w="12700">
                       <a:solidFill>
                         <a:srgbClr val="000000"/>
                       </a:solidFill>
@@ -23369,7 +23369,7 @@
             </a:ln>
             <a:extLst>
               <a:ext uri="{909E8E84-426E-40dd-AFC4-6F175D3DCCD1}">
-                <a14:hiddenFill xmlns="" xmlns:a14="http://schemas.microsoft.com/office/drawing/2010/main">
+                <a14:hiddenFill xmlns:a14="http://schemas.microsoft.com/office/drawing/2010/main" xmlns="">
                   <a:solidFill>
                     <a:srgbClr val="FFFFFF"/>
                   </a:solidFill>
@@ -23530,7 +23530,7 @@
             </a:ln>
             <a:extLst>
               <a:ext uri="{909E8E84-426E-40dd-AFC4-6F175D3DCCD1}">
-                <a14:hiddenFill xmlns="" xmlns:a14="http://schemas.microsoft.com/office/drawing/2010/main">
+                <a14:hiddenFill xmlns:a14="http://schemas.microsoft.com/office/drawing/2010/main" xmlns="">
                   <a:solidFill>
                     <a:srgbClr val="FFFFFF"/>
                   </a:solidFill>
@@ -23707,7 +23707,7 @@
               </a:ln>
               <a:extLst>
                 <a:ext uri="{909E8E84-426E-40dd-AFC4-6F175D3DCCD1}">
-                  <a14:hiddenFill xmlns="" xmlns:a14="http://schemas.microsoft.com/office/drawing/2010/main">
+                  <a14:hiddenFill xmlns:a14="http://schemas.microsoft.com/office/drawing/2010/main" xmlns="">
                     <a:solidFill>
                       <a:srgbClr val="FFFFFF"/>
                     </a:solidFill>
@@ -23861,14 +23861,14 @@
               </a:ln>
               <a:extLst>
                 <a:ext uri="{909E8E84-426E-40dd-AFC4-6F175D3DCCD1}">
-                  <a14:hiddenFill xmlns="" xmlns:a14="http://schemas.microsoft.com/office/drawing/2010/main">
+                  <a14:hiddenFill xmlns:a14="http://schemas.microsoft.com/office/drawing/2010/main" xmlns="">
                     <a:solidFill>
                       <a:srgbClr val="FFFFFF"/>
                     </a:solidFill>
                   </a14:hiddenFill>
                 </a:ext>
                 <a:ext uri="{91240B29-F687-4f45-9708-019B960494DF}">
-                  <a14:hiddenLine xmlns="" xmlns:a14="http://schemas.microsoft.com/office/drawing/2010/main" w="12700">
+                  <a14:hiddenLine xmlns:a14="http://schemas.microsoft.com/office/drawing/2010/main" xmlns="" w="12700">
                     <a:solidFill>
                       <a:srgbClr val="000000"/>
                     </a:solidFill>
@@ -24036,14 +24036,14 @@
               </a:ln>
               <a:extLst>
                 <a:ext uri="{909E8E84-426E-40dd-AFC4-6F175D3DCCD1}">
-                  <a14:hiddenFill xmlns="" xmlns:a14="http://schemas.microsoft.com/office/drawing/2010/main">
+                  <a14:hiddenFill xmlns:a14="http://schemas.microsoft.com/office/drawing/2010/main" xmlns="">
                     <a:solidFill>
                       <a:srgbClr val="FFFFFF"/>
                     </a:solidFill>
                   </a14:hiddenFill>
                 </a:ext>
                 <a:ext uri="{91240B29-F687-4f45-9708-019B960494DF}">
-                  <a14:hiddenLine xmlns="" xmlns:a14="http://schemas.microsoft.com/office/drawing/2010/main" w="12700">
+                  <a14:hiddenLine xmlns:a14="http://schemas.microsoft.com/office/drawing/2010/main" xmlns="" w="12700">
                     <a:solidFill>
                       <a:srgbClr val="000000"/>
                     </a:solidFill>
@@ -24211,14 +24211,14 @@
               </a:ln>
               <a:extLst>
                 <a:ext uri="{909E8E84-426E-40dd-AFC4-6F175D3DCCD1}">
-                  <a14:hiddenFill xmlns="" xmlns:a14="http://schemas.microsoft.com/office/drawing/2010/main">
+                  <a14:hiddenFill xmlns:a14="http://schemas.microsoft.com/office/drawing/2010/main" xmlns="">
                     <a:solidFill>
                       <a:srgbClr val="FFFFFF"/>
                     </a:solidFill>
                   </a14:hiddenFill>
                 </a:ext>
                 <a:ext uri="{91240B29-F687-4f45-9708-019B960494DF}">
-                  <a14:hiddenLine xmlns="" xmlns:a14="http://schemas.microsoft.com/office/drawing/2010/main" w="12700">
+                  <a14:hiddenLine xmlns:a14="http://schemas.microsoft.com/office/drawing/2010/main" xmlns="" w="12700">
                     <a:solidFill>
                       <a:srgbClr val="000000"/>
                     </a:solidFill>
@@ -24391,7 +24391,7 @@
               </a:ln>
               <a:extLst>
                 <a:ext uri="{909E8E84-426E-40dd-AFC4-6F175D3DCCD1}">
-                  <a14:hiddenFill xmlns="" xmlns:a14="http://schemas.microsoft.com/office/drawing/2010/main">
+                  <a14:hiddenFill xmlns:a14="http://schemas.microsoft.com/office/drawing/2010/main" xmlns="">
                     <a:noFill/>
                   </a14:hiddenFill>
                 </a:ext>
@@ -24432,7 +24432,7 @@
               </a:ln>
               <a:extLst>
                 <a:ext uri="{909E8E84-426E-40dd-AFC4-6F175D3DCCD1}">
-                  <a14:hiddenFill xmlns="" xmlns:a14="http://schemas.microsoft.com/office/drawing/2010/main">
+                  <a14:hiddenFill xmlns:a14="http://schemas.microsoft.com/office/drawing/2010/main" xmlns="">
                     <a:noFill/>
                   </a14:hiddenFill>
                 </a:ext>
@@ -24491,7 +24491,7 @@
             </a:ln>
             <a:extLst>
               <a:ext uri="{909E8E84-426E-40dd-AFC4-6F175D3DCCD1}">
-                <a14:hiddenFill xmlns="" xmlns:a14="http://schemas.microsoft.com/office/drawing/2010/main">
+                <a14:hiddenFill xmlns:a14="http://schemas.microsoft.com/office/drawing/2010/main" xmlns="">
                   <a:solidFill>
                     <a:srgbClr val="FFFFFF"/>
                   </a:solidFill>
@@ -24652,7 +24652,7 @@
             </a:ln>
             <a:extLst>
               <a:ext uri="{909E8E84-426E-40dd-AFC4-6F175D3DCCD1}">
-                <a14:hiddenFill xmlns="" xmlns:a14="http://schemas.microsoft.com/office/drawing/2010/main">
+                <a14:hiddenFill xmlns:a14="http://schemas.microsoft.com/office/drawing/2010/main" xmlns="">
                   <a:solidFill>
                     <a:srgbClr val="FFFFFF"/>
                   </a:solidFill>
@@ -24829,7 +24829,7 @@
               </a:ln>
               <a:extLst>
                 <a:ext uri="{909E8E84-426E-40dd-AFC4-6F175D3DCCD1}">
-                  <a14:hiddenFill xmlns="" xmlns:a14="http://schemas.microsoft.com/office/drawing/2010/main">
+                  <a14:hiddenFill xmlns:a14="http://schemas.microsoft.com/office/drawing/2010/main" xmlns="">
                     <a:solidFill>
                       <a:srgbClr val="FFFFFF"/>
                     </a:solidFill>
@@ -24983,14 +24983,14 @@
               </a:ln>
               <a:extLst>
                 <a:ext uri="{909E8E84-426E-40dd-AFC4-6F175D3DCCD1}">
-                  <a14:hiddenFill xmlns="" xmlns:a14="http://schemas.microsoft.com/office/drawing/2010/main">
+                  <a14:hiddenFill xmlns:a14="http://schemas.microsoft.com/office/drawing/2010/main" xmlns="">
                     <a:solidFill>
                       <a:srgbClr val="FFFFFF"/>
                     </a:solidFill>
                   </a14:hiddenFill>
                 </a:ext>
                 <a:ext uri="{91240B29-F687-4f45-9708-019B960494DF}">
-                  <a14:hiddenLine xmlns="" xmlns:a14="http://schemas.microsoft.com/office/drawing/2010/main" w="12700">
+                  <a14:hiddenLine xmlns:a14="http://schemas.microsoft.com/office/drawing/2010/main" xmlns="" w="12700">
                     <a:solidFill>
                       <a:srgbClr val="000000"/>
                     </a:solidFill>
@@ -25158,14 +25158,14 @@
               </a:ln>
               <a:extLst>
                 <a:ext uri="{909E8E84-426E-40dd-AFC4-6F175D3DCCD1}">
-                  <a14:hiddenFill xmlns="" xmlns:a14="http://schemas.microsoft.com/office/drawing/2010/main">
+                  <a14:hiddenFill xmlns:a14="http://schemas.microsoft.com/office/drawing/2010/main" xmlns="">
                     <a:solidFill>
                       <a:srgbClr val="FFFFFF"/>
                     </a:solidFill>
                   </a14:hiddenFill>
                 </a:ext>
                 <a:ext uri="{91240B29-F687-4f45-9708-019B960494DF}">
-                  <a14:hiddenLine xmlns="" xmlns:a14="http://schemas.microsoft.com/office/drawing/2010/main" w="12700">
+                  <a14:hiddenLine xmlns:a14="http://schemas.microsoft.com/office/drawing/2010/main" xmlns="" w="12700">
                     <a:solidFill>
                       <a:srgbClr val="000000"/>
                     </a:solidFill>
@@ -25333,14 +25333,14 @@
               </a:ln>
               <a:extLst>
                 <a:ext uri="{909E8E84-426E-40dd-AFC4-6F175D3DCCD1}">
-                  <a14:hiddenFill xmlns="" xmlns:a14="http://schemas.microsoft.com/office/drawing/2010/main">
+                  <a14:hiddenFill xmlns:a14="http://schemas.microsoft.com/office/drawing/2010/main" xmlns="">
                     <a:solidFill>
                       <a:srgbClr val="FFFFFF"/>
                     </a:solidFill>
                   </a14:hiddenFill>
                 </a:ext>
                 <a:ext uri="{91240B29-F687-4f45-9708-019B960494DF}">
-                  <a14:hiddenLine xmlns="" xmlns:a14="http://schemas.microsoft.com/office/drawing/2010/main" w="12700">
+                  <a14:hiddenLine xmlns:a14="http://schemas.microsoft.com/office/drawing/2010/main" xmlns="" w="12700">
                     <a:solidFill>
                       <a:srgbClr val="000000"/>
                     </a:solidFill>
@@ -25513,7 +25513,7 @@
               </a:ln>
               <a:extLst>
                 <a:ext uri="{909E8E84-426E-40dd-AFC4-6F175D3DCCD1}">
-                  <a14:hiddenFill xmlns="" xmlns:a14="http://schemas.microsoft.com/office/drawing/2010/main">
+                  <a14:hiddenFill xmlns:a14="http://schemas.microsoft.com/office/drawing/2010/main" xmlns="">
                     <a:noFill/>
                   </a14:hiddenFill>
                 </a:ext>
@@ -25554,7 +25554,7 @@
               </a:ln>
               <a:extLst>
                 <a:ext uri="{909E8E84-426E-40dd-AFC4-6F175D3DCCD1}">
-                  <a14:hiddenFill xmlns="" xmlns:a14="http://schemas.microsoft.com/office/drawing/2010/main">
+                  <a14:hiddenFill xmlns:a14="http://schemas.microsoft.com/office/drawing/2010/main" xmlns="">
                     <a:noFill/>
                   </a14:hiddenFill>
                 </a:ext>
@@ -27607,7 +27607,7 @@
                   <a:schemeClr val="accent2"/>
                 </a:solidFill>
               </a:rPr>
-              <a:t>Diameter =  7</a:t>
+              <a:t>Diameter =  6</a:t>
             </a:r>
           </a:p>
         </p:txBody>
@@ -30132,7 +30132,7 @@
             </a:pPr>
             <a:r>
               <a:rPr lang="en-US" sz="2400" b="1" dirty="0"/>
-              <a:t>Diameter =  the number of nodes on the longest path between two nodes in the tree (does not have to go through the root!)</a:t>
+              <a:t>Diameter =  the number of edges on the longest path between two nodes in the tree (does not have to go through the root!)</a:t>
             </a:r>
           </a:p>
         </p:txBody>
@@ -31585,8 +31585,21 @@
                   <a:schemeClr val="accent2"/>
                 </a:solidFill>
               </a:rPr>
-              <a:t>Diameter =  5</a:t>
+              <a:t>Diameter </a:t>
             </a:r>
+            <a:r>
+              <a:rPr lang="en-US" sz="3200" b="1">
+                <a:solidFill>
+                  <a:schemeClr val="accent2"/>
+                </a:solidFill>
+              </a:rPr>
+              <a:t>=  4</a:t>
+            </a:r>
+            <a:endParaRPr lang="en-US" sz="3200" b="1" dirty="0">
+              <a:solidFill>
+                <a:schemeClr val="accent2"/>
+              </a:solidFill>
+            </a:endParaRPr>
           </a:p>
         </p:txBody>
       </p:sp>
@@ -33735,14 +33748,14 @@
           <a:noFill/>
           <a:extLst>
             <a:ext uri="{909E8E84-426E-40dd-AFC4-6F175D3DCCD1}">
-              <a14:hiddenFill xmlns="" xmlns:a14="http://schemas.microsoft.com/office/drawing/2010/main">
+              <a14:hiddenFill xmlns:a14="http://schemas.microsoft.com/office/drawing/2010/main" xmlns="">
                 <a:solidFill>
                   <a:srgbClr val="FFFFFF"/>
                 </a:solidFill>
               </a14:hiddenFill>
             </a:ext>
             <a:ext uri="{91240B29-F687-4f45-9708-019B960494DF}">
-              <a14:hiddenLine xmlns="" xmlns:a14="http://schemas.microsoft.com/office/drawing/2010/main" w="9525">
+              <a14:hiddenLine xmlns:a14="http://schemas.microsoft.com/office/drawing/2010/main" xmlns="" w="9525">
                 <a:solidFill>
                   <a:srgbClr val="000000"/>
                 </a:solidFill>
@@ -34040,14 +34053,14 @@
           <a:noFill/>
           <a:extLst>
             <a:ext uri="{909E8E84-426E-40dd-AFC4-6F175D3DCCD1}">
-              <a14:hiddenFill xmlns="" xmlns:a14="http://schemas.microsoft.com/office/drawing/2010/main">
+              <a14:hiddenFill xmlns:a14="http://schemas.microsoft.com/office/drawing/2010/main" xmlns="">
                 <a:solidFill>
                   <a:srgbClr val="FFFFFF"/>
                 </a:solidFill>
               </a14:hiddenFill>
             </a:ext>
             <a:ext uri="{91240B29-F687-4f45-9708-019B960494DF}">
-              <a14:hiddenLine xmlns="" xmlns:a14="http://schemas.microsoft.com/office/drawing/2010/main" w="9525">
+              <a14:hiddenLine xmlns:a14="http://schemas.microsoft.com/office/drawing/2010/main" xmlns="" w="9525">
                 <a:solidFill>
                   <a:srgbClr val="000000"/>
                 </a:solidFill>

--- a/u08a_bTrees/notes/_b - Attributes and and building BSTs.pptx
+++ b/u08a_bTrees/notes/_b - Attributes and and building BSTs.pptx
@@ -33257,6 +33257,192 @@
           </a:p>
         </p:txBody>
       </p:sp>
+      <p:sp>
+        <p:nvSpPr>
+          <p:cNvPr id="4" name="Text Box 3">
+            <a:extLst>
+              <a:ext uri="{FF2B5EF4-FFF2-40B4-BE49-F238E27FC236}">
+                <a16:creationId xmlns:a16="http://schemas.microsoft.com/office/drawing/2014/main" id="{C376F1DA-CC47-E041-8560-8DFB0BE946DA}"/>
+              </a:ext>
+            </a:extLst>
+          </p:cNvPr>
+          <p:cNvSpPr txBox="1">
+            <a:spLocks noChangeArrowheads="1"/>
+          </p:cNvSpPr>
+          <p:nvPr/>
+        </p:nvSpPr>
+        <p:spPr bwMode="auto">
+          <a:xfrm>
+            <a:off x="6790834" y="3598856"/>
+            <a:ext cx="2353166" cy="954107"/>
+          </a:xfrm>
+          <a:prstGeom prst="rect">
+            <a:avLst/>
+          </a:prstGeom>
+          <a:noFill/>
+          <a:ln>
+            <a:noFill/>
+          </a:ln>
+          <a:effectLst/>
+          <a:extLst>
+            <a:ext uri="{909E8E84-426E-40DD-AFC4-6F175D3DCCD1}">
+              <a14:hiddenFill xmlns:a14="http://schemas.microsoft.com/office/drawing/2010/main">
+                <a:solidFill>
+                  <a:schemeClr val="accent1"/>
+                </a:solidFill>
+              </a14:hiddenFill>
+            </a:ext>
+            <a:ext uri="{91240B29-F687-4F45-9708-019B960494DF}">
+              <a14:hiddenLine xmlns:a14="http://schemas.microsoft.com/office/drawing/2010/main" w="12700">
+                <a:solidFill>
+                  <a:schemeClr val="tx1"/>
+                </a:solidFill>
+                <a:miter lim="800000"/>
+                <a:headEnd type="none" w="sm" len="sm"/>
+                <a:tailEnd type="none" w="sm" len="sm"/>
+              </a14:hiddenLine>
+            </a:ext>
+            <a:ext uri="{AF507438-7753-43E0-B8FC-AC1667EBCBE1}">
+              <a14:hiddenEffects xmlns:a14="http://schemas.microsoft.com/office/drawing/2010/main">
+                <a:effectLst>
+                  <a:outerShdw dist="35921" dir="2700000" algn="ctr" rotWithShape="0">
+                    <a:schemeClr val="bg2"/>
+                  </a:outerShdw>
+                </a:effectLst>
+              </a14:hiddenEffects>
+            </a:ext>
+          </a:extLst>
+        </p:spPr>
+        <p:txBody>
+          <a:bodyPr wrap="square">
+            <a:spAutoFit/>
+          </a:bodyPr>
+          <a:lstStyle>
+            <a:lvl1pPr>
+              <a:defRPr sz="2400">
+                <a:solidFill>
+                  <a:schemeClr val="tx1"/>
+                </a:solidFill>
+                <a:latin typeface="Tahoma" pitchFamily="34" charset="0"/>
+              </a:defRPr>
+            </a:lvl1pPr>
+            <a:lvl2pPr marL="742950" indent="-285750">
+              <a:defRPr sz="2400">
+                <a:solidFill>
+                  <a:schemeClr val="tx1"/>
+                </a:solidFill>
+                <a:latin typeface="Tahoma" pitchFamily="34" charset="0"/>
+              </a:defRPr>
+            </a:lvl2pPr>
+            <a:lvl3pPr marL="1143000" indent="-228600">
+              <a:defRPr sz="2400">
+                <a:solidFill>
+                  <a:schemeClr val="tx1"/>
+                </a:solidFill>
+                <a:latin typeface="Tahoma" pitchFamily="34" charset="0"/>
+              </a:defRPr>
+            </a:lvl3pPr>
+            <a:lvl4pPr marL="1600200" indent="-228600">
+              <a:defRPr sz="2400">
+                <a:solidFill>
+                  <a:schemeClr val="tx1"/>
+                </a:solidFill>
+                <a:latin typeface="Tahoma" pitchFamily="34" charset="0"/>
+              </a:defRPr>
+            </a:lvl4pPr>
+            <a:lvl5pPr marL="2057400" indent="-228600">
+              <a:defRPr sz="2400">
+                <a:solidFill>
+                  <a:schemeClr val="tx1"/>
+                </a:solidFill>
+                <a:latin typeface="Tahoma" pitchFamily="34" charset="0"/>
+              </a:defRPr>
+            </a:lvl5pPr>
+            <a:lvl6pPr marL="2514600" indent="-228600" eaLnBrk="0" fontAlgn="base" hangingPunct="0">
+              <a:spcBef>
+                <a:spcPct val="0"/>
+              </a:spcBef>
+              <a:spcAft>
+                <a:spcPct val="0"/>
+              </a:spcAft>
+              <a:defRPr sz="2400">
+                <a:solidFill>
+                  <a:schemeClr val="tx1"/>
+                </a:solidFill>
+                <a:latin typeface="Tahoma" pitchFamily="34" charset="0"/>
+              </a:defRPr>
+            </a:lvl6pPr>
+            <a:lvl7pPr marL="2971800" indent="-228600" eaLnBrk="0" fontAlgn="base" hangingPunct="0">
+              <a:spcBef>
+                <a:spcPct val="0"/>
+              </a:spcBef>
+              <a:spcAft>
+                <a:spcPct val="0"/>
+              </a:spcAft>
+              <a:defRPr sz="2400">
+                <a:solidFill>
+                  <a:schemeClr val="tx1"/>
+                </a:solidFill>
+                <a:latin typeface="Tahoma" pitchFamily="34" charset="0"/>
+              </a:defRPr>
+            </a:lvl7pPr>
+            <a:lvl8pPr marL="3429000" indent="-228600" eaLnBrk="0" fontAlgn="base" hangingPunct="0">
+              <a:spcBef>
+                <a:spcPct val="0"/>
+              </a:spcBef>
+              <a:spcAft>
+                <a:spcPct val="0"/>
+              </a:spcAft>
+              <a:defRPr sz="2400">
+                <a:solidFill>
+                  <a:schemeClr val="tx1"/>
+                </a:solidFill>
+                <a:latin typeface="Tahoma" pitchFamily="34" charset="0"/>
+              </a:defRPr>
+            </a:lvl8pPr>
+            <a:lvl9pPr marL="3886200" indent="-228600" eaLnBrk="0" fontAlgn="base" hangingPunct="0">
+              <a:spcBef>
+                <a:spcPct val="0"/>
+              </a:spcBef>
+              <a:spcAft>
+                <a:spcPct val="0"/>
+              </a:spcAft>
+              <a:defRPr sz="2400">
+                <a:solidFill>
+                  <a:schemeClr val="tx1"/>
+                </a:solidFill>
+                <a:latin typeface="Tahoma" pitchFamily="34" charset="0"/>
+              </a:defRPr>
+            </a:lvl9pPr>
+          </a:lstStyle>
+          <a:p>
+            <a:pPr algn="ctr"/>
+            <a:r>
+              <a:rPr lang="en-US" sz="2800" b="1" dirty="0">
+                <a:solidFill>
+                  <a:schemeClr val="accent6">
+                    <a:lumMod val="75000"/>
+                  </a:schemeClr>
+                </a:solidFill>
+              </a:rPr>
+              <a:t>L = P + 1</a:t>
+            </a:r>
+          </a:p>
+          <a:p>
+            <a:pPr algn="ctr"/>
+            <a:r>
+              <a:rPr lang="en-US" sz="2800" b="1" dirty="0">
+                <a:solidFill>
+                  <a:schemeClr val="accent6">
+                    <a:lumMod val="75000"/>
+                  </a:schemeClr>
+                </a:solidFill>
+              </a:rPr>
+              <a:t>P = L – 1</a:t>
+            </a:r>
+          </a:p>
+        </p:txBody>
+      </p:sp>
     </p:spTree>
     <p:extLst>
       <p:ext uri="{BB962C8B-B14F-4D97-AF65-F5344CB8AC3E}">
@@ -33267,6 +33453,130 @@
   <p:clrMapOvr>
     <a:masterClrMapping/>
   </p:clrMapOvr>
+  <p:timing>
+    <p:tnLst>
+      <p:par>
+        <p:cTn id="1" dur="indefinite" restart="never" nodeType="tmRoot">
+          <p:childTnLst>
+            <p:seq concurrent="1" nextAc="seek">
+              <p:cTn id="2" dur="indefinite" nodeType="mainSeq">
+                <p:childTnLst>
+                  <p:par>
+                    <p:cTn id="3" fill="hold">
+                      <p:stCondLst>
+                        <p:cond delay="indefinite"/>
+                      </p:stCondLst>
+                      <p:childTnLst>
+                        <p:par>
+                          <p:cTn id="4" fill="hold">
+                            <p:stCondLst>
+                              <p:cond delay="0"/>
+                            </p:stCondLst>
+                            <p:childTnLst>
+                              <p:par>
+                                <p:cTn id="5" presetID="2" presetClass="entr" presetSubtype="2" fill="hold" grpId="0" nodeType="clickEffect">
+                                  <p:stCondLst>
+                                    <p:cond delay="0"/>
+                                  </p:stCondLst>
+                                  <p:childTnLst>
+                                    <p:set>
+                                      <p:cBhvr>
+                                        <p:cTn id="6" dur="1" fill="hold">
+                                          <p:stCondLst>
+                                            <p:cond delay="0"/>
+                                          </p:stCondLst>
+                                        </p:cTn>
+                                        <p:tgtEl>
+                                          <p:spTgt spid="4"/>
+                                        </p:tgtEl>
+                                        <p:attrNameLst>
+                                          <p:attrName>style.visibility</p:attrName>
+                                        </p:attrNameLst>
+                                      </p:cBhvr>
+                                      <p:to>
+                                        <p:strVal val="visible"/>
+                                      </p:to>
+                                    </p:set>
+                                    <p:anim calcmode="lin" valueType="num">
+                                      <p:cBhvr additive="base">
+                                        <p:cTn id="7" dur="500" fill="hold"/>
+                                        <p:tgtEl>
+                                          <p:spTgt spid="4"/>
+                                        </p:tgtEl>
+                                        <p:attrNameLst>
+                                          <p:attrName>ppt_x</p:attrName>
+                                        </p:attrNameLst>
+                                      </p:cBhvr>
+                                      <p:tavLst>
+                                        <p:tav tm="0">
+                                          <p:val>
+                                            <p:strVal val="1+#ppt_w/2"/>
+                                          </p:val>
+                                        </p:tav>
+                                        <p:tav tm="100000">
+                                          <p:val>
+                                            <p:strVal val="#ppt_x"/>
+                                          </p:val>
+                                        </p:tav>
+                                      </p:tavLst>
+                                    </p:anim>
+                                    <p:anim calcmode="lin" valueType="num">
+                                      <p:cBhvr additive="base">
+                                        <p:cTn id="8" dur="500" fill="hold"/>
+                                        <p:tgtEl>
+                                          <p:spTgt spid="4"/>
+                                        </p:tgtEl>
+                                        <p:attrNameLst>
+                                          <p:attrName>ppt_y</p:attrName>
+                                        </p:attrNameLst>
+                                      </p:cBhvr>
+                                      <p:tavLst>
+                                        <p:tav tm="0">
+                                          <p:val>
+                                            <p:strVal val="#ppt_y"/>
+                                          </p:val>
+                                        </p:tav>
+                                        <p:tav tm="100000">
+                                          <p:val>
+                                            <p:strVal val="#ppt_y"/>
+                                          </p:val>
+                                        </p:tav>
+                                      </p:tavLst>
+                                    </p:anim>
+                                  </p:childTnLst>
+                                </p:cTn>
+                              </p:par>
+                            </p:childTnLst>
+                          </p:cTn>
+                        </p:par>
+                      </p:childTnLst>
+                    </p:cTn>
+                  </p:par>
+                </p:childTnLst>
+              </p:cTn>
+              <p:prevCondLst>
+                <p:cond evt="onPrev" delay="0">
+                  <p:tgtEl>
+                    <p:sldTgt/>
+                  </p:tgtEl>
+                </p:cond>
+              </p:prevCondLst>
+              <p:nextCondLst>
+                <p:cond evt="onNext" delay="0">
+                  <p:tgtEl>
+                    <p:sldTgt/>
+                  </p:tgtEl>
+                </p:cond>
+              </p:nextCondLst>
+            </p:seq>
+          </p:childTnLst>
+        </p:cTn>
+      </p:par>
+    </p:tnLst>
+    <p:bldLst>
+      <p:bldP spid="4" grpId="0"/>
+    </p:bldLst>
+  </p:timing>
 </p:sld>
 </file>
 
@@ -33807,7 +34117,7 @@
                   </a:schemeClr>
                 </a:solidFill>
               </a:rPr>
-              <a:t>Full binary tree theorem 2: The number of nodes is always one more than twice the number of parents (a.k.a. internal nodes).</a:t>
+              <a:t>Full binary tree theorem 2: The number of parents (a.k.a. internal nodes) is always half of one less than the number of nodes.</a:t>
             </a:r>
           </a:p>
         </p:txBody>
@@ -34405,7 +34715,7 @@
                   </a:schemeClr>
                 </a:solidFill>
               </a:rPr>
-              <a:t>N = 2 * P + 1</a:t>
+              <a:t>P = (N – 1) / 2</a:t>
             </a:r>
           </a:p>
           <a:p>
@@ -34422,7 +34732,7 @@
                   </a:schemeClr>
                 </a:solidFill>
               </a:rPr>
-              <a:t>P = (N – 1) / 2</a:t>
+              <a:t>N = 2 * P + 1</a:t>
             </a:r>
           </a:p>
         </p:txBody>
@@ -35082,7 +35392,7 @@
         </p:nvSpPr>
         <p:spPr bwMode="auto">
           <a:xfrm>
-            <a:off x="1295400" y="0"/>
+            <a:off x="239531" y="-20541"/>
             <a:ext cx="6324600" cy="1828800"/>
           </a:xfrm>
           <a:prstGeom prst="rect">
@@ -35732,8 +36042,8 @@
         </p:nvSpPr>
         <p:spPr bwMode="auto">
           <a:xfrm>
-            <a:off x="4572000" y="2438400"/>
-            <a:ext cx="4191000" cy="3882473"/>
+            <a:off x="4923916" y="2477333"/>
+            <a:ext cx="4067684" cy="3882473"/>
           </a:xfrm>
           <a:prstGeom prst="rect">
             <a:avLst/>
@@ -36148,6 +36458,57 @@
             <a:r>
               <a:rPr lang="en-US" sz="2800" b="1" dirty="0"/>
               <a:t>Total nodes = 5</a:t>
+            </a:r>
+          </a:p>
+        </p:txBody>
+      </p:sp>
+      <p:sp>
+        <p:nvSpPr>
+          <p:cNvPr id="5" name="TextBox 4">
+            <a:extLst>
+              <a:ext uri="{FF2B5EF4-FFF2-40B4-BE49-F238E27FC236}">
+                <a16:creationId xmlns:a16="http://schemas.microsoft.com/office/drawing/2014/main" id="{CB019E90-49EB-0F56-E04B-747DEDE4AA3B}"/>
+              </a:ext>
+            </a:extLst>
+          </p:cNvPr>
+          <p:cNvSpPr txBox="1"/>
+          <p:nvPr/>
+        </p:nvSpPr>
+        <p:spPr>
+          <a:xfrm>
+            <a:off x="3401045" y="2727045"/>
+            <a:ext cx="2057400" cy="830997"/>
+          </a:xfrm>
+          <a:prstGeom prst="rect">
+            <a:avLst/>
+          </a:prstGeom>
+          <a:noFill/>
+        </p:spPr>
+        <p:txBody>
+          <a:bodyPr wrap="square">
+            <a:spAutoFit/>
+          </a:bodyPr>
+          <a:lstStyle/>
+          <a:p>
+            <a:pPr algn="ctr"/>
+            <a:r>
+              <a:rPr lang="en-US" sz="2400" b="1" dirty="0">
+                <a:solidFill>
+                  <a:srgbClr val="7030A0"/>
+                </a:solidFill>
+              </a:rPr>
+              <a:t>L = P + 1</a:t>
+            </a:r>
+          </a:p>
+          <a:p>
+            <a:pPr algn="ctr"/>
+            <a:r>
+              <a:rPr lang="en-US" sz="2400" b="1" dirty="0">
+                <a:solidFill>
+                  <a:srgbClr val="7030A0"/>
+                </a:solidFill>
+              </a:rPr>
+              <a:t>P = L – 1</a:t>
             </a:r>
           </a:p>
         </p:txBody>
@@ -37404,7 +37765,13 @@
       </p:grpSpPr>
       <p:sp>
         <p:nvSpPr>
-          <p:cNvPr id="43010" name="Footer Placeholder 3"/>
+          <p:cNvPr id="4" name="Footer Placeholder 3">
+            <a:extLst>
+              <a:ext uri="{FF2B5EF4-FFF2-40B4-BE49-F238E27FC236}">
+                <a16:creationId xmlns:a16="http://schemas.microsoft.com/office/drawing/2014/main" id="{740F33F0-26BE-BBB7-895B-F801CF9C9B51}"/>
+              </a:ext>
+            </a:extLst>
+          </p:cNvPr>
           <p:cNvSpPr>
             <a:spLocks noGrp="1"/>
           </p:cNvSpPr>
@@ -37544,176 +37911,13 @@
       </p:sp>
       <p:sp>
         <p:nvSpPr>
-          <p:cNvPr id="43011" name="Text Box 2"/>
-          <p:cNvSpPr txBox="1">
-            <a:spLocks noChangeArrowheads="1"/>
-          </p:cNvSpPr>
-          <p:nvPr/>
-        </p:nvSpPr>
-        <p:spPr bwMode="auto">
-          <a:xfrm>
-            <a:off x="838200" y="5511003"/>
-            <a:ext cx="7620000" cy="523220"/>
-          </a:xfrm>
-          <a:prstGeom prst="rect">
-            <a:avLst/>
-          </a:prstGeom>
-          <a:noFill/>
-          <a:ln>
-            <a:noFill/>
-          </a:ln>
-          <a:effectLst/>
-          <a:extLst>
-            <a:ext uri="{909E8E84-426E-40DD-AFC4-6F175D3DCCD1}">
-              <a14:hiddenFill xmlns:a14="http://schemas.microsoft.com/office/drawing/2010/main">
-                <a:solidFill>
-                  <a:schemeClr val="accent1"/>
-                </a:solidFill>
-              </a14:hiddenFill>
-            </a:ext>
-            <a:ext uri="{91240B29-F687-4F45-9708-019B960494DF}">
-              <a14:hiddenLine xmlns:a14="http://schemas.microsoft.com/office/drawing/2010/main" w="12700">
-                <a:solidFill>
-                  <a:schemeClr val="tx1"/>
-                </a:solidFill>
-                <a:miter lim="800000"/>
-                <a:headEnd type="none" w="sm" len="sm"/>
-                <a:tailEnd type="none" w="sm" len="sm"/>
-              </a14:hiddenLine>
-            </a:ext>
-            <a:ext uri="{AF507438-7753-43E0-B8FC-AC1667EBCBE1}">
-              <a14:hiddenEffects xmlns:a14="http://schemas.microsoft.com/office/drawing/2010/main">
-                <a:effectLst>
-                  <a:outerShdw dist="35921" dir="2700000" algn="ctr" rotWithShape="0">
-                    <a:schemeClr val="bg2"/>
-                  </a:outerShdw>
-                </a:effectLst>
-              </a14:hiddenEffects>
-            </a:ext>
-          </a:extLst>
-        </p:spPr>
-        <p:txBody>
-          <a:bodyPr wrap="square">
-            <a:spAutoFit/>
-          </a:bodyPr>
-          <a:lstStyle>
-            <a:lvl1pPr>
-              <a:defRPr sz="2400">
-                <a:solidFill>
-                  <a:schemeClr val="tx1"/>
-                </a:solidFill>
-                <a:latin typeface="Tahoma" pitchFamily="34" charset="0"/>
-              </a:defRPr>
-            </a:lvl1pPr>
-            <a:lvl2pPr marL="742950" indent="-285750">
-              <a:defRPr sz="2400">
-                <a:solidFill>
-                  <a:schemeClr val="tx1"/>
-                </a:solidFill>
-                <a:latin typeface="Tahoma" pitchFamily="34" charset="0"/>
-              </a:defRPr>
-            </a:lvl2pPr>
-            <a:lvl3pPr marL="1143000" indent="-228600">
-              <a:defRPr sz="2400">
-                <a:solidFill>
-                  <a:schemeClr val="tx1"/>
-                </a:solidFill>
-                <a:latin typeface="Tahoma" pitchFamily="34" charset="0"/>
-              </a:defRPr>
-            </a:lvl3pPr>
-            <a:lvl4pPr marL="1600200" indent="-228600">
-              <a:defRPr sz="2400">
-                <a:solidFill>
-                  <a:schemeClr val="tx1"/>
-                </a:solidFill>
-                <a:latin typeface="Tahoma" pitchFamily="34" charset="0"/>
-              </a:defRPr>
-            </a:lvl4pPr>
-            <a:lvl5pPr marL="2057400" indent="-228600">
-              <a:defRPr sz="2400">
-                <a:solidFill>
-                  <a:schemeClr val="tx1"/>
-                </a:solidFill>
-                <a:latin typeface="Tahoma" pitchFamily="34" charset="0"/>
-              </a:defRPr>
-            </a:lvl5pPr>
-            <a:lvl6pPr marL="2514600" indent="-228600" eaLnBrk="0" fontAlgn="base" hangingPunct="0">
-              <a:spcBef>
-                <a:spcPct val="0"/>
-              </a:spcBef>
-              <a:spcAft>
-                <a:spcPct val="0"/>
-              </a:spcAft>
-              <a:defRPr sz="2400">
-                <a:solidFill>
-                  <a:schemeClr val="tx1"/>
-                </a:solidFill>
-                <a:latin typeface="Tahoma" pitchFamily="34" charset="0"/>
-              </a:defRPr>
-            </a:lvl6pPr>
-            <a:lvl7pPr marL="2971800" indent="-228600" eaLnBrk="0" fontAlgn="base" hangingPunct="0">
-              <a:spcBef>
-                <a:spcPct val="0"/>
-              </a:spcBef>
-              <a:spcAft>
-                <a:spcPct val="0"/>
-              </a:spcAft>
-              <a:defRPr sz="2400">
-                <a:solidFill>
-                  <a:schemeClr val="tx1"/>
-                </a:solidFill>
-                <a:latin typeface="Tahoma" pitchFamily="34" charset="0"/>
-              </a:defRPr>
-            </a:lvl7pPr>
-            <a:lvl8pPr marL="3429000" indent="-228600" eaLnBrk="0" fontAlgn="base" hangingPunct="0">
-              <a:spcBef>
-                <a:spcPct val="0"/>
-              </a:spcBef>
-              <a:spcAft>
-                <a:spcPct val="0"/>
-              </a:spcAft>
-              <a:defRPr sz="2400">
-                <a:solidFill>
-                  <a:schemeClr val="tx1"/>
-                </a:solidFill>
-                <a:latin typeface="Tahoma" pitchFamily="34" charset="0"/>
-              </a:defRPr>
-            </a:lvl8pPr>
-            <a:lvl9pPr marL="3886200" indent="-228600" eaLnBrk="0" fontAlgn="base" hangingPunct="0">
-              <a:spcBef>
-                <a:spcPct val="0"/>
-              </a:spcBef>
-              <a:spcAft>
-                <a:spcPct val="0"/>
-              </a:spcAft>
-              <a:defRPr sz="2400">
-                <a:solidFill>
-                  <a:schemeClr val="tx1"/>
-                </a:solidFill>
-                <a:latin typeface="Tahoma" pitchFamily="34" charset="0"/>
-              </a:defRPr>
-            </a:lvl9pPr>
-          </a:lstStyle>
-          <a:p>
-            <a:pPr>
-              <a:tabLst>
-                <a:tab pos="4114800" algn="l"/>
-              </a:tabLst>
-            </a:pPr>
-            <a:r>
-              <a:rPr lang="en-US" sz="2800" b="1" dirty="0">
-                <a:solidFill>
-                  <a:schemeClr val="accent2"/>
-                </a:solidFill>
-              </a:rPr>
-              <a:t>NUMLEVELS  -  4 	NUMLEAVES  -  5</a:t>
-            </a:r>
-          </a:p>
-        </p:txBody>
-      </p:sp>
-      <p:sp>
-        <p:nvSpPr>
-          <p:cNvPr id="43028" name="WordArt 19"/>
+          <p:cNvPr id="5" name="WordArt 19">
+            <a:extLst>
+              <a:ext uri="{FF2B5EF4-FFF2-40B4-BE49-F238E27FC236}">
+                <a16:creationId xmlns:a16="http://schemas.microsoft.com/office/drawing/2014/main" id="{F87975A7-5FEC-94F2-9F9F-D204E05B06A7}"/>
+              </a:ext>
+            </a:extLst>
+          </p:cNvPr>
           <p:cNvSpPr>
             <a:spLocks noChangeArrowheads="1" noChangeShapeType="1" noTextEdit="1"/>
           </p:cNvSpPr>
@@ -37721,8 +37925,8 @@
         </p:nvSpPr>
         <p:spPr bwMode="auto">
           <a:xfrm>
-            <a:off x="1828800" y="228600"/>
-            <a:ext cx="4953000" cy="457200"/>
+            <a:off x="685800" y="1314157"/>
+            <a:ext cx="7848600" cy="724486"/>
           </a:xfrm>
           <a:prstGeom prst="rect">
             <a:avLst/>
@@ -37766,10 +37970,10 @@
       </p:sp>
       <p:grpSp>
         <p:nvGrpSpPr>
-          <p:cNvPr id="2" name="Group 1" descr="A binary tree with four levels and ten nodes:&#10;&#10;Row 0: 90&#10;Row 1:&#10; 90 has two children: 50 as a left child and 120 as a right child&#10;Row 2:&#10; 50 has two children: 40 as a left child and 65 as a right child&#10; 120 has two children: 100 as a left child and 150 as a right child&#10;Row 3:&#10;   40 has two children: 30 as a left child and 45 as a right child&#10;    65 only has a right child, 70&#10;">
+          <p:cNvPr id="6" name="Group 5" descr="A binary tree with four levels and ten nodes:&#10;&#10;Row 0: 90&#10;Row 1:&#10; 90 has two children: 50 as a left child and 120 as a right child&#10;Row 2:&#10; 50 has two children: 40 as a left child and 65 as a right child&#10; 120 has two children: 100 as a left child and 150 as a right child&#10;Row 3:&#10;   40 has two children: 30 as a left child and 45 as a right child&#10;    65 only has a right child, 70&#10;">
             <a:extLst>
               <a:ext uri="{FF2B5EF4-FFF2-40B4-BE49-F238E27FC236}">
-                <a16:creationId xmlns:a16="http://schemas.microsoft.com/office/drawing/2014/main" id="{1267F955-D1C6-DFD7-57AC-683EDE7C5161}"/>
+                <a16:creationId xmlns:a16="http://schemas.microsoft.com/office/drawing/2014/main" id="{7A722877-2E62-6CE5-5143-2DC396EC1EE9}"/>
               </a:ext>
             </a:extLst>
           </p:cNvPr>
@@ -37778,7 +37982,7 @@
         </p:nvGrpSpPr>
         <p:grpSpPr>
           <a:xfrm>
-            <a:off x="838200" y="1066800"/>
+            <a:off x="1045369" y="2971800"/>
             <a:ext cx="7129463" cy="2057400"/>
             <a:chOff x="838200" y="1066800"/>
             <a:chExt cx="7129463" cy="2057400"/>
@@ -37786,7 +37990,13 @@
         </p:grpSpPr>
         <p:sp>
           <p:nvSpPr>
-            <p:cNvPr id="43012" name="Oval 3"/>
+            <p:cNvPr id="7" name="Oval 3">
+              <a:extLst>
+                <a:ext uri="{FF2B5EF4-FFF2-40B4-BE49-F238E27FC236}">
+                  <a16:creationId xmlns:a16="http://schemas.microsoft.com/office/drawing/2014/main" id="{81432D8E-22AD-5313-3F1A-0F519B8FAF1E}"/>
+                </a:ext>
+              </a:extLst>
+            </p:cNvPr>
             <p:cNvSpPr>
               <a:spLocks noChangeArrowheads="1"/>
             </p:cNvSpPr>
@@ -37838,7 +38048,13 @@
         </p:sp>
         <p:sp>
           <p:nvSpPr>
-            <p:cNvPr id="43013" name="Oval 4"/>
+            <p:cNvPr id="8" name="Oval 4">
+              <a:extLst>
+                <a:ext uri="{FF2B5EF4-FFF2-40B4-BE49-F238E27FC236}">
+                  <a16:creationId xmlns:a16="http://schemas.microsoft.com/office/drawing/2014/main" id="{43F4C2D5-2652-F800-D1E8-EE4173E9F438}"/>
+                </a:ext>
+              </a:extLst>
+            </p:cNvPr>
             <p:cNvSpPr>
               <a:spLocks noChangeArrowheads="1"/>
             </p:cNvSpPr>
@@ -37890,7 +38106,13 @@
         </p:sp>
         <p:sp>
           <p:nvSpPr>
-            <p:cNvPr id="43014" name="Oval 5"/>
+            <p:cNvPr id="9" name="Oval 5">
+              <a:extLst>
+                <a:ext uri="{FF2B5EF4-FFF2-40B4-BE49-F238E27FC236}">
+                  <a16:creationId xmlns:a16="http://schemas.microsoft.com/office/drawing/2014/main" id="{99892498-01D5-DA8D-4FBE-ED1E72962802}"/>
+                </a:ext>
+              </a:extLst>
+            </p:cNvPr>
             <p:cNvSpPr>
               <a:spLocks noChangeArrowheads="1"/>
             </p:cNvSpPr>
@@ -37942,7 +38164,13 @@
         </p:sp>
         <p:sp>
           <p:nvSpPr>
-            <p:cNvPr id="43015" name="Oval 6"/>
+            <p:cNvPr id="10" name="Oval 6">
+              <a:extLst>
+                <a:ext uri="{FF2B5EF4-FFF2-40B4-BE49-F238E27FC236}">
+                  <a16:creationId xmlns:a16="http://schemas.microsoft.com/office/drawing/2014/main" id="{35A93A16-5579-6CD5-B78B-35E4314498F2}"/>
+                </a:ext>
+              </a:extLst>
+            </p:cNvPr>
             <p:cNvSpPr>
               <a:spLocks noChangeArrowheads="1"/>
             </p:cNvSpPr>
@@ -37986,7 +38214,7 @@
             <a:p>
               <a:pPr algn="ctr"/>
               <a:r>
-                <a:rPr lang="en-US"/>
+                <a:rPr lang="en-US" dirty="0"/>
                 <a:t>65</a:t>
               </a:r>
             </a:p>
@@ -37994,7 +38222,13 @@
         </p:sp>
         <p:sp>
           <p:nvSpPr>
-            <p:cNvPr id="43016" name="Oval 7"/>
+            <p:cNvPr id="11" name="Oval 7">
+              <a:extLst>
+                <a:ext uri="{FF2B5EF4-FFF2-40B4-BE49-F238E27FC236}">
+                  <a16:creationId xmlns:a16="http://schemas.microsoft.com/office/drawing/2014/main" id="{495AA6E0-D4F4-FBA9-28F9-EC67D66B0B26}"/>
+                </a:ext>
+              </a:extLst>
+            </p:cNvPr>
             <p:cNvSpPr>
               <a:spLocks noChangeArrowheads="1"/>
             </p:cNvSpPr>
@@ -38046,7 +38280,13 @@
         </p:sp>
         <p:sp>
           <p:nvSpPr>
-            <p:cNvPr id="43017" name="Oval 8"/>
+            <p:cNvPr id="12" name="Oval 8">
+              <a:extLst>
+                <a:ext uri="{FF2B5EF4-FFF2-40B4-BE49-F238E27FC236}">
+                  <a16:creationId xmlns:a16="http://schemas.microsoft.com/office/drawing/2014/main" id="{AC3384E0-B094-594A-8680-B2CC79A4D263}"/>
+                </a:ext>
+              </a:extLst>
+            </p:cNvPr>
             <p:cNvSpPr>
               <a:spLocks noChangeArrowheads="1"/>
             </p:cNvSpPr>
@@ -38098,7 +38338,13 @@
         </p:sp>
         <p:sp>
           <p:nvSpPr>
-            <p:cNvPr id="43018" name="Oval 9"/>
+            <p:cNvPr id="13" name="Oval 9">
+              <a:extLst>
+                <a:ext uri="{FF2B5EF4-FFF2-40B4-BE49-F238E27FC236}">
+                  <a16:creationId xmlns:a16="http://schemas.microsoft.com/office/drawing/2014/main" id="{B233A469-366F-372A-71A7-44846C8AFD59}"/>
+                </a:ext>
+              </a:extLst>
+            </p:cNvPr>
             <p:cNvSpPr>
               <a:spLocks noChangeArrowheads="1"/>
             </p:cNvSpPr>
@@ -38150,7 +38396,13 @@
         </p:sp>
         <p:sp>
           <p:nvSpPr>
-            <p:cNvPr id="43019" name="Oval 10"/>
+            <p:cNvPr id="14" name="Oval 10">
+              <a:extLst>
+                <a:ext uri="{FF2B5EF4-FFF2-40B4-BE49-F238E27FC236}">
+                  <a16:creationId xmlns:a16="http://schemas.microsoft.com/office/drawing/2014/main" id="{A972946B-6D03-E545-85DF-C2973DFAFA48}"/>
+                </a:ext>
+              </a:extLst>
+            </p:cNvPr>
             <p:cNvSpPr>
               <a:spLocks noChangeArrowheads="1"/>
             </p:cNvSpPr>
@@ -38202,7 +38454,13 @@
         </p:sp>
         <p:sp>
           <p:nvSpPr>
-            <p:cNvPr id="43020" name="Oval 11"/>
+            <p:cNvPr id="15" name="Oval 11">
+              <a:extLst>
+                <a:ext uri="{FF2B5EF4-FFF2-40B4-BE49-F238E27FC236}">
+                  <a16:creationId xmlns:a16="http://schemas.microsoft.com/office/drawing/2014/main" id="{D52BEDAA-F047-30B5-933A-A245AA94EB5D}"/>
+                </a:ext>
+              </a:extLst>
+            </p:cNvPr>
             <p:cNvSpPr>
               <a:spLocks noChangeArrowheads="1"/>
             </p:cNvSpPr>
@@ -38254,7 +38512,13 @@
         </p:sp>
         <p:sp>
           <p:nvSpPr>
-            <p:cNvPr id="43021" name="Oval 12"/>
+            <p:cNvPr id="16" name="Oval 12">
+              <a:extLst>
+                <a:ext uri="{FF2B5EF4-FFF2-40B4-BE49-F238E27FC236}">
+                  <a16:creationId xmlns:a16="http://schemas.microsoft.com/office/drawing/2014/main" id="{9B438040-987F-6E3B-F81A-4187598FB3A5}"/>
+                </a:ext>
+              </a:extLst>
+            </p:cNvPr>
             <p:cNvSpPr>
               <a:spLocks noChangeArrowheads="1"/>
             </p:cNvSpPr>
@@ -38306,7 +38570,13 @@
         </p:sp>
         <p:sp>
           <p:nvSpPr>
-            <p:cNvPr id="43022" name="Line 13"/>
+            <p:cNvPr id="17" name="Line 13">
+              <a:extLst>
+                <a:ext uri="{FF2B5EF4-FFF2-40B4-BE49-F238E27FC236}">
+                  <a16:creationId xmlns:a16="http://schemas.microsoft.com/office/drawing/2014/main" id="{69EA55C8-6065-DB25-51CF-39708716EB36}"/>
+                </a:ext>
+              </a:extLst>
+            </p:cNvPr>
             <p:cNvSpPr>
               <a:spLocks noChangeShapeType="1"/>
             </p:cNvSpPr>
@@ -38357,7 +38627,13 @@
         </p:sp>
         <p:sp>
           <p:nvSpPr>
-            <p:cNvPr id="43023" name="Line 14"/>
+            <p:cNvPr id="18" name="Line 14">
+              <a:extLst>
+                <a:ext uri="{FF2B5EF4-FFF2-40B4-BE49-F238E27FC236}">
+                  <a16:creationId xmlns:a16="http://schemas.microsoft.com/office/drawing/2014/main" id="{EDEB0CD9-17CF-721A-E5DF-33533A694288}"/>
+                </a:ext>
+              </a:extLst>
+            </p:cNvPr>
             <p:cNvSpPr>
               <a:spLocks noChangeShapeType="1"/>
             </p:cNvSpPr>
@@ -38408,7 +38684,13 @@
         </p:sp>
         <p:sp>
           <p:nvSpPr>
-            <p:cNvPr id="43024" name="Line 15"/>
+            <p:cNvPr id="19" name="Line 15">
+              <a:extLst>
+                <a:ext uri="{FF2B5EF4-FFF2-40B4-BE49-F238E27FC236}">
+                  <a16:creationId xmlns:a16="http://schemas.microsoft.com/office/drawing/2014/main" id="{24C05F9B-4BD1-9303-2E3C-4B27E10DE4B0}"/>
+                </a:ext>
+              </a:extLst>
+            </p:cNvPr>
             <p:cNvSpPr>
               <a:spLocks noChangeShapeType="1"/>
             </p:cNvSpPr>
@@ -38459,7 +38741,13 @@
         </p:sp>
         <p:sp>
           <p:nvSpPr>
-            <p:cNvPr id="43025" name="Line 16"/>
+            <p:cNvPr id="20" name="Line 16">
+              <a:extLst>
+                <a:ext uri="{FF2B5EF4-FFF2-40B4-BE49-F238E27FC236}">
+                  <a16:creationId xmlns:a16="http://schemas.microsoft.com/office/drawing/2014/main" id="{E006078A-CECB-0B15-B29C-5E0062359179}"/>
+                </a:ext>
+              </a:extLst>
+            </p:cNvPr>
             <p:cNvSpPr>
               <a:spLocks noChangeShapeType="1"/>
             </p:cNvSpPr>
@@ -38510,7 +38798,13 @@
         </p:sp>
         <p:sp>
           <p:nvSpPr>
-            <p:cNvPr id="43026" name="Line 17"/>
+            <p:cNvPr id="21" name="Line 17">
+              <a:extLst>
+                <a:ext uri="{FF2B5EF4-FFF2-40B4-BE49-F238E27FC236}">
+                  <a16:creationId xmlns:a16="http://schemas.microsoft.com/office/drawing/2014/main" id="{B665A467-001C-6906-FC37-6F9E9D596BA1}"/>
+                </a:ext>
+              </a:extLst>
+            </p:cNvPr>
             <p:cNvSpPr>
               <a:spLocks noChangeShapeType="1"/>
             </p:cNvSpPr>
@@ -38561,7 +38855,13 @@
         </p:sp>
         <p:sp>
           <p:nvSpPr>
-            <p:cNvPr id="43027" name="Line 18"/>
+            <p:cNvPr id="22" name="Line 18">
+              <a:extLst>
+                <a:ext uri="{FF2B5EF4-FFF2-40B4-BE49-F238E27FC236}">
+                  <a16:creationId xmlns:a16="http://schemas.microsoft.com/office/drawing/2014/main" id="{9003B543-223E-C6D4-55A8-529490AB4C52}"/>
+                </a:ext>
+              </a:extLst>
+            </p:cNvPr>
             <p:cNvSpPr>
               <a:spLocks noChangeShapeType="1"/>
             </p:cNvSpPr>
@@ -38612,7 +38912,13 @@
         </p:sp>
         <p:sp>
           <p:nvSpPr>
-            <p:cNvPr id="43029" name="Oval 20"/>
+            <p:cNvPr id="23" name="Oval 20">
+              <a:extLst>
+                <a:ext uri="{FF2B5EF4-FFF2-40B4-BE49-F238E27FC236}">
+                  <a16:creationId xmlns:a16="http://schemas.microsoft.com/office/drawing/2014/main" id="{C71FCB5E-21F7-A5BC-7742-37E56B6E5A21}"/>
+                </a:ext>
+              </a:extLst>
+            </p:cNvPr>
             <p:cNvSpPr>
               <a:spLocks noChangeArrowheads="1"/>
             </p:cNvSpPr>
@@ -38663,60 +38969,6 @@
           </p:txBody>
         </p:sp>
       </p:grpSp>
-      <p:sp>
-        <p:nvSpPr>
-          <p:cNvPr id="3" name="TextBox 2">
-            <a:extLst>
-              <a:ext uri="{FF2B5EF4-FFF2-40B4-BE49-F238E27FC236}">
-                <a16:creationId xmlns:a16="http://schemas.microsoft.com/office/drawing/2014/main" id="{2C6DBC21-0E0F-0EAB-9E24-E21ADE712964}"/>
-              </a:ext>
-            </a:extLst>
-          </p:cNvPr>
-          <p:cNvSpPr txBox="1"/>
-          <p:nvPr/>
-        </p:nvSpPr>
-        <p:spPr>
-          <a:xfrm>
-            <a:off x="560784" y="3542520"/>
-            <a:ext cx="8022431" cy="1492716"/>
-          </a:xfrm>
-          <a:prstGeom prst="rect">
-            <a:avLst/>
-          </a:prstGeom>
-          <a:noFill/>
-        </p:spPr>
-        <p:txBody>
-          <a:bodyPr wrap="square">
-            <a:spAutoFit/>
-          </a:bodyPr>
-          <a:lstStyle/>
-          <a:p>
-            <a:pPr algn="ctr"/>
-            <a:r>
-              <a:rPr lang="en-US" sz="2800" b="1" dirty="0"/>
-              <a:t>LEVEL = ROW = nodes with same height</a:t>
-            </a:r>
-          </a:p>
-          <a:p>
-            <a:pPr algn="ctr"/>
-            <a:endParaRPr lang="en-US" sz="700" b="1" dirty="0"/>
-          </a:p>
-          <a:p>
-            <a:pPr algn="ctr"/>
-            <a:r>
-              <a:rPr lang="en-US" sz="2800" b="1" dirty="0"/>
-              <a:t>level 0 contains the root</a:t>
-            </a:r>
-          </a:p>
-          <a:p>
-            <a:pPr algn="ctr"/>
-            <a:r>
-              <a:rPr lang="en-US" sz="2800" b="1" dirty="0"/>
-              <a:t> level 1 contains the children of the root </a:t>
-            </a:r>
-          </a:p>
-        </p:txBody>
-      </p:sp>
     </p:spTree>
   </p:cSld>
   <p:clrMapOvr>
@@ -38792,7 +39044,7 @@
         <p:spPr>
           <a:xfrm>
             <a:off x="228600" y="76200"/>
-            <a:ext cx="3352800" cy="1815882"/>
+            <a:ext cx="3352800" cy="1384995"/>
           </a:xfrm>
           <a:prstGeom prst="rect">
             <a:avLst/>
@@ -38807,7 +39059,17 @@
           <a:p>
             <a:pPr algn="l"/>
             <a:r>
-              <a:rPr lang="en-US" sz="2800" b="0" i="0" dirty="0">
+              <a:rPr lang="en-US" sz="2800" u="sng" dirty="0">
+                <a:solidFill>
+                  <a:srgbClr val="0000CC"/>
+                </a:solidFill>
+                <a:latin typeface="Source Sans Pro SemiBold" panose="020B0603030403020204" pitchFamily="34" charset="0"/>
+                <a:ea typeface="Source Sans Pro SemiBold" panose="020B0603030403020204" pitchFamily="34" charset="0"/>
+              </a:rPr>
+              <a:t>D</a:t>
+            </a:r>
+            <a:r>
+              <a:rPr lang="en-US" sz="2800" b="0" i="0" u="sng" dirty="0">
                 <a:solidFill>
                   <a:srgbClr val="0000CC"/>
                 </a:solidFill>
@@ -38815,10 +39077,10 @@
                 <a:latin typeface="Source Sans Pro SemiBold" panose="020B0603030403020204" pitchFamily="34" charset="0"/>
                 <a:ea typeface="Source Sans Pro SemiBold" panose="020B0603030403020204" pitchFamily="34" charset="0"/>
               </a:rPr>
-              <a:t>The </a:t>
-            </a:r>
-            <a:r>
-              <a:rPr lang="en-US" sz="2800" b="0" i="0" u="sng" dirty="0">
+              <a:t>epth of a node</a:t>
+            </a:r>
+            <a:r>
+              <a:rPr lang="en-US" sz="2800" b="0" i="0" dirty="0">
                 <a:solidFill>
                   <a:srgbClr val="0000CC"/>
                 </a:solidFill>
@@ -38826,9 +39088,9 @@
                 <a:latin typeface="Source Sans Pro SemiBold" panose="020B0603030403020204" pitchFamily="34" charset="0"/>
                 <a:ea typeface="Source Sans Pro SemiBold" panose="020B0603030403020204" pitchFamily="34" charset="0"/>
               </a:rPr>
-              <a:t>depth of a node </a:t>
-            </a:r>
-            <a:r>
+              <a:t>:</a:t>
+            </a:r>
+            <a:br>
               <a:rPr lang="en-US" sz="2800" b="0" i="0" dirty="0">
                 <a:solidFill>
                   <a:srgbClr val="0000CC"/>
@@ -38837,7 +39099,17 @@
                 <a:latin typeface="Source Sans Pro SemiBold" panose="020B0603030403020204" pitchFamily="34" charset="0"/>
                 <a:ea typeface="Source Sans Pro SemiBold" panose="020B0603030403020204" pitchFamily="34" charset="0"/>
               </a:rPr>
-              <a:t>is the number of edges from the root to the node.</a:t>
+            </a:br>
+            <a:r>
+              <a:rPr lang="en-US" sz="2800" b="0" i="0" dirty="0">
+                <a:solidFill>
+                  <a:srgbClr val="0000CC"/>
+                </a:solidFill>
+                <a:effectLst/>
+                <a:latin typeface="Source Sans Pro SemiBold" panose="020B0603030403020204" pitchFamily="34" charset="0"/>
+                <a:ea typeface="Source Sans Pro SemiBold" panose="020B0603030403020204" pitchFamily="34" charset="0"/>
+              </a:rPr>
+              <a:t># of edges from the root to the node.</a:t>
             </a:r>
           </a:p>
         </p:txBody>
@@ -38856,8 +39128,8 @@
         </p:nvSpPr>
         <p:spPr>
           <a:xfrm>
-            <a:off x="190500" y="5092005"/>
-            <a:ext cx="4533900" cy="1384995"/>
+            <a:off x="190500" y="5044870"/>
+            <a:ext cx="4533900" cy="1815882"/>
           </a:xfrm>
           <a:prstGeom prst="rect">
             <a:avLst/>
@@ -38872,7 +39144,7 @@
           <a:p>
             <a:pPr algn="l"/>
             <a:r>
-              <a:rPr lang="en-US" sz="2800" b="0" i="0" dirty="0">
+              <a:rPr lang="en-US" sz="2800" b="0" i="0" u="sng" dirty="0">
                 <a:solidFill>
                   <a:srgbClr val="0000CC"/>
                 </a:solidFill>
@@ -38881,10 +39153,10 @@
                 <a:ea typeface="Source Sans Pro SemiBold" panose="020B0603030403020204" pitchFamily="34" charset="0"/>
                 <a:cs typeface="Tahoma" panose="020B0604030504040204" pitchFamily="34" charset="0"/>
               </a:rPr>
-              <a:t>The </a:t>
-            </a:r>
-            <a:r>
-              <a:rPr lang="en-US" sz="2800" b="0" i="0" u="sng" dirty="0">
+              <a:t>Height of a node</a:t>
+            </a:r>
+            <a:r>
+              <a:rPr lang="en-US" sz="2800" b="0" i="0" dirty="0">
                 <a:solidFill>
                   <a:srgbClr val="0000CC"/>
                 </a:solidFill>
@@ -38893,9 +39165,9 @@
                 <a:ea typeface="Source Sans Pro SemiBold" panose="020B0603030403020204" pitchFamily="34" charset="0"/>
                 <a:cs typeface="Tahoma" panose="020B0604030504040204" pitchFamily="34" charset="0"/>
               </a:rPr>
-              <a:t>height of a node </a:t>
-            </a:r>
-            <a:r>
+              <a:t>: </a:t>
+            </a:r>
+            <a:br>
               <a:rPr lang="en-US" sz="2800" b="0" i="0" dirty="0">
                 <a:solidFill>
                   <a:srgbClr val="0000CC"/>
@@ -38905,8 +39177,413 @@
                 <a:ea typeface="Source Sans Pro SemiBold" panose="020B0603030403020204" pitchFamily="34" charset="0"/>
                 <a:cs typeface="Tahoma" panose="020B0604030504040204" pitchFamily="34" charset="0"/>
               </a:rPr>
-              <a:t>is the number of edges from the node to the deepest leaf.</a:t>
-            </a:r>
+            </a:br>
+            <a:r>
+              <a:rPr lang="en-US" sz="2800" b="0" i="0" dirty="0">
+                <a:solidFill>
+                  <a:srgbClr val="0000CC"/>
+                </a:solidFill>
+                <a:effectLst/>
+                <a:latin typeface="Source Sans Pro SemiBold" panose="020B0603030403020204" pitchFamily="34" charset="0"/>
+                <a:ea typeface="Source Sans Pro SemiBold" panose="020B0603030403020204" pitchFamily="34" charset="0"/>
+                <a:cs typeface="Tahoma" panose="020B0604030504040204" pitchFamily="34" charset="0"/>
+              </a:rPr>
+              <a:t># of edges from the node to the deepest leaf in the leaf’s subtree.</a:t>
+            </a:r>
+          </a:p>
+        </p:txBody>
+      </p:sp>
+      <p:sp>
+        <p:nvSpPr>
+          <p:cNvPr id="3" name="TextBox 2">
+            <a:extLst>
+              <a:ext uri="{FF2B5EF4-FFF2-40B4-BE49-F238E27FC236}">
+                <a16:creationId xmlns:a16="http://schemas.microsoft.com/office/drawing/2014/main" id="{4D65D959-31F0-F766-08B8-4A8AD96787DD}"/>
+              </a:ext>
+            </a:extLst>
+          </p:cNvPr>
+          <p:cNvSpPr txBox="1"/>
+          <p:nvPr/>
+        </p:nvSpPr>
+        <p:spPr>
+          <a:xfrm>
+            <a:off x="3457281" y="476054"/>
+            <a:ext cx="990600" cy="523220"/>
+          </a:xfrm>
+          <a:prstGeom prst="rect">
+            <a:avLst/>
+          </a:prstGeom>
+          <a:solidFill>
+            <a:schemeClr val="bg1"/>
+          </a:solidFill>
+        </p:spPr>
+        <p:txBody>
+          <a:bodyPr wrap="square">
+            <a:spAutoFit/>
+          </a:bodyPr>
+          <a:lstStyle/>
+          <a:p>
+            <a:pPr algn="r"/>
+            <a:r>
+              <a:rPr lang="en-US" sz="1400" b="1" i="0" dirty="0">
+                <a:effectLst/>
+                <a:latin typeface="Source Sans Pro SemiBold" panose="020B0603030403020204" pitchFamily="34" charset="0"/>
+                <a:ea typeface="Source Sans Pro SemiBold" panose="020B0603030403020204" pitchFamily="34" charset="0"/>
+              </a:rPr>
+              <a:t>Depth = 0</a:t>
+            </a:r>
+          </a:p>
+          <a:p>
+            <a:pPr algn="r"/>
+            <a:r>
+              <a:rPr lang="en-US" sz="1400" b="1" dirty="0">
+                <a:solidFill>
+                  <a:schemeClr val="accent1">
+                    <a:lumMod val="50000"/>
+                  </a:schemeClr>
+                </a:solidFill>
+                <a:latin typeface="Source Sans Pro SemiBold" panose="020B0603030403020204" pitchFamily="34" charset="0"/>
+                <a:ea typeface="Source Sans Pro SemiBold" panose="020B0603030403020204" pitchFamily="34" charset="0"/>
+              </a:rPr>
+              <a:t>Height = 3</a:t>
+            </a:r>
+            <a:endParaRPr lang="en-US" sz="1400" b="1" i="0" dirty="0">
+              <a:solidFill>
+                <a:schemeClr val="accent1">
+                  <a:lumMod val="50000"/>
+                </a:schemeClr>
+              </a:solidFill>
+              <a:effectLst/>
+              <a:latin typeface="Source Sans Pro SemiBold" panose="020B0603030403020204" pitchFamily="34" charset="0"/>
+              <a:ea typeface="Source Sans Pro SemiBold" panose="020B0603030403020204" pitchFamily="34" charset="0"/>
+            </a:endParaRPr>
+          </a:p>
+        </p:txBody>
+      </p:sp>
+      <p:sp>
+        <p:nvSpPr>
+          <p:cNvPr id="6" name="TextBox 5">
+            <a:extLst>
+              <a:ext uri="{FF2B5EF4-FFF2-40B4-BE49-F238E27FC236}">
+                <a16:creationId xmlns:a16="http://schemas.microsoft.com/office/drawing/2014/main" id="{C07FBB22-141E-4FE8-489E-B9937689698E}"/>
+              </a:ext>
+            </a:extLst>
+          </p:cNvPr>
+          <p:cNvSpPr txBox="1"/>
+          <p:nvPr/>
+        </p:nvSpPr>
+        <p:spPr>
+          <a:xfrm>
+            <a:off x="4901153" y="1892082"/>
+            <a:ext cx="990600" cy="523220"/>
+          </a:xfrm>
+          <a:prstGeom prst="rect">
+            <a:avLst/>
+          </a:prstGeom>
+          <a:solidFill>
+            <a:schemeClr val="bg1"/>
+          </a:solidFill>
+        </p:spPr>
+        <p:txBody>
+          <a:bodyPr wrap="square">
+            <a:spAutoFit/>
+          </a:bodyPr>
+          <a:lstStyle/>
+          <a:p>
+            <a:pPr algn="r"/>
+            <a:r>
+              <a:rPr lang="en-US" sz="1400" b="1" i="0" dirty="0">
+                <a:effectLst/>
+                <a:latin typeface="Source Sans Pro SemiBold" panose="020B0603030403020204" pitchFamily="34" charset="0"/>
+                <a:ea typeface="Source Sans Pro SemiBold" panose="020B0603030403020204" pitchFamily="34" charset="0"/>
+              </a:rPr>
+              <a:t>Depth = 1</a:t>
+            </a:r>
+          </a:p>
+          <a:p>
+            <a:pPr algn="r"/>
+            <a:r>
+              <a:rPr lang="en-US" sz="1400" b="1" dirty="0">
+                <a:solidFill>
+                  <a:schemeClr val="accent1">
+                    <a:lumMod val="50000"/>
+                  </a:schemeClr>
+                </a:solidFill>
+                <a:latin typeface="Source Sans Pro SemiBold" panose="020B0603030403020204" pitchFamily="34" charset="0"/>
+                <a:ea typeface="Source Sans Pro SemiBold" panose="020B0603030403020204" pitchFamily="34" charset="0"/>
+              </a:rPr>
+              <a:t>Height = 2</a:t>
+            </a:r>
+            <a:endParaRPr lang="en-US" sz="1400" b="1" i="0" dirty="0">
+              <a:solidFill>
+                <a:schemeClr val="accent1">
+                  <a:lumMod val="50000"/>
+                </a:schemeClr>
+              </a:solidFill>
+              <a:effectLst/>
+              <a:latin typeface="Source Sans Pro SemiBold" panose="020B0603030403020204" pitchFamily="34" charset="0"/>
+              <a:ea typeface="Source Sans Pro SemiBold" panose="020B0603030403020204" pitchFamily="34" charset="0"/>
+            </a:endParaRPr>
+          </a:p>
+        </p:txBody>
+      </p:sp>
+      <p:sp>
+        <p:nvSpPr>
+          <p:cNvPr id="7" name="TextBox 6">
+            <a:extLst>
+              <a:ext uri="{FF2B5EF4-FFF2-40B4-BE49-F238E27FC236}">
+                <a16:creationId xmlns:a16="http://schemas.microsoft.com/office/drawing/2014/main" id="{87B1FFC7-F9F2-4ECD-2B89-4727F32A207C}"/>
+              </a:ext>
+            </a:extLst>
+          </p:cNvPr>
+          <p:cNvSpPr txBox="1"/>
+          <p:nvPr/>
+        </p:nvSpPr>
+        <p:spPr>
+          <a:xfrm>
+            <a:off x="6109355" y="3666329"/>
+            <a:ext cx="990600" cy="523220"/>
+          </a:xfrm>
+          <a:prstGeom prst="rect">
+            <a:avLst/>
+          </a:prstGeom>
+          <a:solidFill>
+            <a:schemeClr val="bg1"/>
+          </a:solidFill>
+        </p:spPr>
+        <p:txBody>
+          <a:bodyPr wrap="square">
+            <a:spAutoFit/>
+          </a:bodyPr>
+          <a:lstStyle/>
+          <a:p>
+            <a:pPr algn="r"/>
+            <a:r>
+              <a:rPr lang="en-US" sz="1400" b="1" i="0" dirty="0">
+                <a:effectLst/>
+                <a:latin typeface="Source Sans Pro SemiBold" panose="020B0603030403020204" pitchFamily="34" charset="0"/>
+                <a:ea typeface="Source Sans Pro SemiBold" panose="020B0603030403020204" pitchFamily="34" charset="0"/>
+              </a:rPr>
+              <a:t>Depth = 2</a:t>
+            </a:r>
+          </a:p>
+          <a:p>
+            <a:pPr algn="r"/>
+            <a:r>
+              <a:rPr lang="en-US" sz="1400" b="1" dirty="0">
+                <a:solidFill>
+                  <a:schemeClr val="accent1">
+                    <a:lumMod val="50000"/>
+                  </a:schemeClr>
+                </a:solidFill>
+                <a:latin typeface="Source Sans Pro SemiBold" panose="020B0603030403020204" pitchFamily="34" charset="0"/>
+                <a:ea typeface="Source Sans Pro SemiBold" panose="020B0603030403020204" pitchFamily="34" charset="0"/>
+              </a:rPr>
+              <a:t>Height = 1</a:t>
+            </a:r>
+            <a:endParaRPr lang="en-US" sz="1400" b="1" i="0" dirty="0">
+              <a:solidFill>
+                <a:schemeClr val="accent1">
+                  <a:lumMod val="50000"/>
+                </a:schemeClr>
+              </a:solidFill>
+              <a:effectLst/>
+              <a:latin typeface="Source Sans Pro SemiBold" panose="020B0603030403020204" pitchFamily="34" charset="0"/>
+              <a:ea typeface="Source Sans Pro SemiBold" panose="020B0603030403020204" pitchFamily="34" charset="0"/>
+            </a:endParaRPr>
+          </a:p>
+        </p:txBody>
+      </p:sp>
+      <p:sp>
+        <p:nvSpPr>
+          <p:cNvPr id="8" name="TextBox 7">
+            <a:extLst>
+              <a:ext uri="{FF2B5EF4-FFF2-40B4-BE49-F238E27FC236}">
+                <a16:creationId xmlns:a16="http://schemas.microsoft.com/office/drawing/2014/main" id="{001A8F11-C05F-5F72-6A4C-970765C6FC60}"/>
+              </a:ext>
+            </a:extLst>
+          </p:cNvPr>
+          <p:cNvSpPr txBox="1"/>
+          <p:nvPr/>
+        </p:nvSpPr>
+        <p:spPr>
+          <a:xfrm>
+            <a:off x="4914900" y="5713954"/>
+            <a:ext cx="990600" cy="523220"/>
+          </a:xfrm>
+          <a:prstGeom prst="rect">
+            <a:avLst/>
+          </a:prstGeom>
+          <a:solidFill>
+            <a:schemeClr val="bg1"/>
+          </a:solidFill>
+        </p:spPr>
+        <p:txBody>
+          <a:bodyPr wrap="square">
+            <a:spAutoFit/>
+          </a:bodyPr>
+          <a:lstStyle/>
+          <a:p>
+            <a:pPr algn="r"/>
+            <a:r>
+              <a:rPr lang="en-US" sz="1400" b="1" i="0" dirty="0">
+                <a:effectLst/>
+                <a:latin typeface="Source Sans Pro SemiBold" panose="020B0603030403020204" pitchFamily="34" charset="0"/>
+                <a:ea typeface="Source Sans Pro SemiBold" panose="020B0603030403020204" pitchFamily="34" charset="0"/>
+              </a:rPr>
+              <a:t>Depth = 3</a:t>
+            </a:r>
+          </a:p>
+          <a:p>
+            <a:pPr algn="r"/>
+            <a:r>
+              <a:rPr lang="en-US" sz="1400" b="1" dirty="0">
+                <a:solidFill>
+                  <a:schemeClr val="accent1">
+                    <a:lumMod val="50000"/>
+                  </a:schemeClr>
+                </a:solidFill>
+                <a:latin typeface="Source Sans Pro SemiBold" panose="020B0603030403020204" pitchFamily="34" charset="0"/>
+                <a:ea typeface="Source Sans Pro SemiBold" panose="020B0603030403020204" pitchFamily="34" charset="0"/>
+              </a:rPr>
+              <a:t>Height = 0</a:t>
+            </a:r>
+            <a:endParaRPr lang="en-US" sz="1400" b="1" i="0" dirty="0">
+              <a:solidFill>
+                <a:schemeClr val="accent1">
+                  <a:lumMod val="50000"/>
+                </a:schemeClr>
+              </a:solidFill>
+              <a:effectLst/>
+              <a:latin typeface="Source Sans Pro SemiBold" panose="020B0603030403020204" pitchFamily="34" charset="0"/>
+              <a:ea typeface="Source Sans Pro SemiBold" panose="020B0603030403020204" pitchFamily="34" charset="0"/>
+            </a:endParaRPr>
+          </a:p>
+        </p:txBody>
+      </p:sp>
+      <p:sp>
+        <p:nvSpPr>
+          <p:cNvPr id="9" name="TextBox 8">
+            <a:extLst>
+              <a:ext uri="{FF2B5EF4-FFF2-40B4-BE49-F238E27FC236}">
+                <a16:creationId xmlns:a16="http://schemas.microsoft.com/office/drawing/2014/main" id="{34F8A66B-66D8-6381-E9EF-F0FDC6644BB1}"/>
+              </a:ext>
+            </a:extLst>
+          </p:cNvPr>
+          <p:cNvSpPr txBox="1"/>
+          <p:nvPr/>
+        </p:nvSpPr>
+        <p:spPr>
+          <a:xfrm>
+            <a:off x="0" y="3647475"/>
+            <a:ext cx="971746" cy="523220"/>
+          </a:xfrm>
+          <a:prstGeom prst="rect">
+            <a:avLst/>
+          </a:prstGeom>
+          <a:solidFill>
+            <a:schemeClr val="bg1"/>
+          </a:solidFill>
+        </p:spPr>
+        <p:txBody>
+          <a:bodyPr wrap="square">
+            <a:spAutoFit/>
+          </a:bodyPr>
+          <a:lstStyle/>
+          <a:p>
+            <a:pPr algn="r"/>
+            <a:r>
+              <a:rPr lang="en-US" sz="1400" b="1" i="0" dirty="0">
+                <a:effectLst/>
+                <a:latin typeface="Source Sans Pro SemiBold" panose="020B0603030403020204" pitchFamily="34" charset="0"/>
+                <a:ea typeface="Source Sans Pro SemiBold" panose="020B0603030403020204" pitchFamily="34" charset="0"/>
+              </a:rPr>
+              <a:t>Depth = 2</a:t>
+            </a:r>
+          </a:p>
+          <a:p>
+            <a:pPr algn="r"/>
+            <a:r>
+              <a:rPr lang="en-US" sz="1400" b="1" dirty="0">
+                <a:solidFill>
+                  <a:srgbClr val="7030A0"/>
+                </a:solidFill>
+                <a:latin typeface="Source Sans Pro SemiBold" panose="020B0603030403020204" pitchFamily="34" charset="0"/>
+                <a:ea typeface="Source Sans Pro SemiBold" panose="020B0603030403020204" pitchFamily="34" charset="0"/>
+              </a:rPr>
+              <a:t>Height = 0</a:t>
+            </a:r>
+            <a:endParaRPr lang="en-US" sz="1400" b="1" i="0" dirty="0">
+              <a:solidFill>
+                <a:srgbClr val="7030A0"/>
+              </a:solidFill>
+              <a:effectLst/>
+              <a:latin typeface="Source Sans Pro SemiBold" panose="020B0603030403020204" pitchFamily="34" charset="0"/>
+              <a:ea typeface="Source Sans Pro SemiBold" panose="020B0603030403020204" pitchFamily="34" charset="0"/>
+            </a:endParaRPr>
+          </a:p>
+        </p:txBody>
+      </p:sp>
+      <p:sp>
+        <p:nvSpPr>
+          <p:cNvPr id="10" name="TextBox 9">
+            <a:extLst>
+              <a:ext uri="{FF2B5EF4-FFF2-40B4-BE49-F238E27FC236}">
+                <a16:creationId xmlns:a16="http://schemas.microsoft.com/office/drawing/2014/main" id="{C6870981-6470-4420-FEA1-3B15FF2DC1B1}"/>
+              </a:ext>
+            </a:extLst>
+          </p:cNvPr>
+          <p:cNvSpPr txBox="1"/>
+          <p:nvPr/>
+        </p:nvSpPr>
+        <p:spPr>
+          <a:xfrm>
+            <a:off x="1971577" y="1892082"/>
+            <a:ext cx="971746" cy="523220"/>
+          </a:xfrm>
+          <a:prstGeom prst="rect">
+            <a:avLst/>
+          </a:prstGeom>
+          <a:solidFill>
+            <a:schemeClr val="bg1"/>
+          </a:solidFill>
+        </p:spPr>
+        <p:txBody>
+          <a:bodyPr wrap="square">
+            <a:spAutoFit/>
+          </a:bodyPr>
+          <a:lstStyle/>
+          <a:p>
+            <a:pPr algn="r"/>
+            <a:r>
+              <a:rPr lang="en-US" sz="1400" b="1" i="0" dirty="0">
+                <a:effectLst/>
+                <a:latin typeface="Source Sans Pro SemiBold" panose="020B0603030403020204" pitchFamily="34" charset="0"/>
+                <a:ea typeface="Source Sans Pro SemiBold" panose="020B0603030403020204" pitchFamily="34" charset="0"/>
+              </a:rPr>
+              <a:t>Depth = 1</a:t>
+            </a:r>
+          </a:p>
+          <a:p>
+            <a:pPr algn="r"/>
+            <a:r>
+              <a:rPr lang="en-US" sz="1400" b="1" dirty="0">
+                <a:solidFill>
+                  <a:srgbClr val="7030A0"/>
+                </a:solidFill>
+                <a:latin typeface="Source Sans Pro SemiBold" panose="020B0603030403020204" pitchFamily="34" charset="0"/>
+                <a:ea typeface="Source Sans Pro SemiBold" panose="020B0603030403020204" pitchFamily="34" charset="0"/>
+              </a:rPr>
+              <a:t>Height = 1</a:t>
+            </a:r>
+            <a:endParaRPr lang="en-US" sz="1400" b="1" i="0" dirty="0">
+              <a:solidFill>
+                <a:srgbClr val="7030A0"/>
+              </a:solidFill>
+              <a:effectLst/>
+              <a:latin typeface="Source Sans Pro SemiBold" panose="020B0603030403020204" pitchFamily="34" charset="0"/>
+              <a:ea typeface="Source Sans Pro SemiBold" panose="020B0603030403020204" pitchFamily="34" charset="0"/>
+            </a:endParaRPr>
           </a:p>
         </p:txBody>
       </p:sp>
